--- a/projetos/gestao-ia-planilhas/produto/kit-advogados/entrega/28-modelo-proposta-de-honorarios-10-slides.pptx
+++ b/projetos/gestao-ia-planilhas/produto/kit-advogados/entrega/28-modelo-proposta-de-honorarios-10-slides.pptx
@@ -511,7 +511,7 @@
           <a:p>
             <a:r>
               <a:rPr lang="en-US" dirty="0"/>
-              <a:t>Modelo do Kit de Gestão para Advogados: troque os textos e mantenha a estrutura. Capa. O título diz o que o cliente contrata, em linguagem dele, não o nome da área. Validade sempre na capa. Os valores vêm do Simulador de honorário (06) e da Proposta de honorários (07); a equipe e as horas, do Custo-hora (05).</a:t>
+              <a:t>Kit de Gestão para Advogados · modelo v1.0 · set/2026 · Modelo do Kit de Gestão para Advogados (v1.0, set/2026): troque os textos e mantenha a estrutura. O símbolo do canto está no slide mestre (Exibir &gt; Slide mestre): apague lá uma vez e some de todos. Capa. O título diz o que o cliente contrata, em linguagem dele, não o nome da área. Validade sempre na capa. Os valores e as horas por etapa vêm da Proposta de honorários (07); a conta interna (Simulador 06, custo-hora 05) fica no escritório e não aparece em nenhum slide.</a:t>
             </a:r>
             <a:endParaRPr lang="en-US" dirty="0"/>
           </a:p>
@@ -599,7 +599,7 @@
           <a:p>
             <a:r>
               <a:rPr lang="en-US" dirty="0"/>
-              <a:t>Fechamento: contato de quem responde, com horário. Não termine com "obrigado": termine com como falar com você.</a:t>
+              <a:t>Kit de Gestão para Advogados · modelo v1.0 · set/2026 · Fechamento: contato de quem responde, com horário. Preencha [e-mail], [telefone] e [endereço]: os colchetes existem para ninguém enviar contato de exemplo. Não termine com "obrigado": termine com como falar com você.</a:t>
             </a:r>
             <a:endParaRPr lang="en-US" dirty="0"/>
           </a:p>
@@ -687,7 +687,7 @@
           <a:p>
             <a:r>
               <a:rPr lang="en-US" dirty="0"/>
-              <a:t>Entendimento. Se o cliente ler e pensar "é isso mesmo", a proposta já está meio aceita. Escopo, não tese: a análise do caso fica para o trabalho contratado.</a:t>
+              <a:t>Kit de Gestão para Advogados · modelo v1.0 · set/2026 · Entendimento. Se o cliente ler e pensar "é isso mesmo", a proposta já está meio aceita. Escopo, não tese: a análise do caso fica para o trabalho contratado.</a:t>
             </a:r>
             <a:endParaRPr lang="en-US" dirty="0"/>
           </a:p>
@@ -775,7 +775,7 @@
           <a:p>
             <a:r>
               <a:rPr lang="en-US" dirty="0"/>
-              <a:t>Etapas. Descreva o caminho em linguagem de gestão (o que acontece, quando, com que frequência), não em linguagem processual. Prazos sempre com "estimativa".</a:t>
+              <a:t>Kit de Gestão para Advogados · modelo v1.0 · set/2026 · Etapas. Descreva o caminho em linguagem de gestão (o que acontece, quando, com que frequência), não em linguagem processual. Prazos sempre com "estimativa". As quatro etapas são as linhas da aba Proposta da planilha 07.</a:t>
             </a:r>
             <a:endParaRPr lang="en-US" dirty="0"/>
           </a:p>
@@ -863,7 +863,7 @@
           <a:p>
             <a:r>
               <a:rPr lang="en-US" dirty="0"/>
-              <a:t>Equipe. Nome, papel e o que cada um faz neste caso. As horas por pessoa vêm do Simulador (06) e servem de base para o valor.</a:t>
+              <a:t>Kit de Gestão para Advogados · modelo v1.0 · set/2026 · Equipe. Nome, papel e o que cada um faz neste caso. As horas por pessoa somam as horas por etapa da proposta (07); a conta de custo dessas horas é interna (05 e 06) e não entra aqui.</a:t>
             </a:r>
             <a:endParaRPr lang="en-US" dirty="0"/>
           </a:p>
@@ -951,7 +951,7 @@
           <a:p>
             <a:r>
               <a:rPr lang="en-US" dirty="0"/>
-              <a:t>Valores. Tabela nativa: clique e edite. Mostre no máximo duas opções e diga qual recomenda. O valor sai do Simulador de honorário (06); a coerência com outros casos, da Tabela de referência (08).</a:t>
+              <a:t>Kit de Gestão para Advogados · modelo v1.0 · set/2026 · Valores. Tabela nativa: clique e edite. Mostre no máximo duas opções e diga qual recomenda. O que o cliente vê: horas por etapa e valor por etapa (aba Proposta da 07). O que fica no escritório: custo-hora, margem e a comparação das modalidades (05, 06 e 08). Nunca cole essas contas aqui: é o item do checklist "Antes de enviar a proposta".</a:t>
             </a:r>
             <a:endParaRPr lang="en-US" dirty="0"/>
           </a:p>
@@ -1039,7 +1039,7 @@
           <a:p>
             <a:r>
               <a:rPr lang="en-US" dirty="0"/>
-              <a:t>Condições. Parcelas com data e valor; a soma tem de bater com o valor total do slide anterior. As datas do exemplo partem da assinatura em outubro de 2026.</a:t>
+              <a:t>Kit de Gestão para Advogados · modelo v1.0 · set/2026 · Condições. Parcelas com data e valor: são as do cronograma de pagamento da planilha 07 (entrada 40 % = R$ 1.800; restante R$ 2.700 em 3 × R$ 900). A soma tem de bater com o valor total do slide anterior.</a:t>
             </a:r>
             <a:endParaRPr lang="en-US" dirty="0"/>
           </a:p>
@@ -1127,7 +1127,7 @@
           <a:p>
             <a:r>
               <a:rPr lang="en-US" dirty="0"/>
-              <a:t>Incluído e não incluído. É o slide que evita desgaste depois. Nunca pule. Se o cliente pedir algo da coluna direita, é proposta nova, não favor.</a:t>
+              <a:t>Kit de Gestão para Advogados · modelo v1.0 · set/2026 · Incluído e não incluído. É o slide que evita desgaste depois. Nunca pule. Se o cliente pedir algo da coluna direita, é proposta nova, não favor.</a:t>
             </a:r>
             <a:endParaRPr lang="en-US" dirty="0"/>
           </a:p>
@@ -1215,7 +1215,7 @@
           <a:p>
             <a:r>
               <a:rPr lang="en-US" dirty="0"/>
-              <a:t>Comunicação. Quatro compromissos simples. Cumpri-los vale mais que qualquer adjetivo sobre o escritório.</a:t>
+              <a:t>Kit de Gestão para Advogados · modelo v1.0 · set/2026 · Comunicação. Quatro compromissos simples. Cumpri-los vale mais que qualquer adjetivo sobre o escritório.</a:t>
             </a:r>
             <a:endParaRPr lang="en-US" dirty="0"/>
           </a:p>
@@ -1303,7 +1303,7 @@
           <a:p>
             <a:r>
               <a:rPr lang="en-US" dirty="0"/>
-              <a:t>Próximos passos com data. O primeiro é a decisão do cliente; os outros mostram que o escritório já tem o caminho pronto.</a:t>
+              <a:t>Kit de Gestão para Advogados · modelo v1.0 · set/2026 · Próximos passos com data. O primeiro é a decisão do cliente (a validade da proposta, 15 dias); os outros mostram que o escritório já tem o caminho pronto.</a:t>
             </a:r>
             <a:endParaRPr lang="en-US" dirty="0"/>
           </a:p>
@@ -1375,6 +1375,286 @@
 </p:sldLayout>
 </file>
 
+<file path=ppt/slideLayouts/slideLayout2.xml><?xml version="1.0" encoding="utf-8"?>
+<p:sldLayout xmlns:a="http://schemas.openxmlformats.org/drawingml/2006/main" xmlns:r="http://schemas.openxmlformats.org/officeDocument/2006/relationships" xmlns:p="http://schemas.openxmlformats.org/presentationml/2006/main" preserve="1">
+  <p:cSld name="CLARO">
+    <p:bg>
+      <p:bgPr>
+        <a:solidFill>
+          <a:srgbClr val="FFFFFF"/>
+        </a:solidFill>
+      </p:bgPr>
+    </p:bg>
+    <p:spTree>
+      <p:nvGrpSpPr>
+        <p:cNvPr id="1" name=""/>
+        <p:cNvGrpSpPr/>
+        <p:nvPr/>
+      </p:nvGrpSpPr>
+      <p:grpSpPr>
+        <a:xfrm>
+          <a:off x="0" y="0"/>
+          <a:ext cx="0" cy="0"/>
+          <a:chOff x="0" y="0"/>
+          <a:chExt cx="0" cy="0"/>
+        </a:xfrm>
+      </p:grpSpPr>
+      <p:sp>
+        <p:nvSpPr>
+          <p:cNvPr id="2" name="Shape 0"/>
+          <p:cNvSpPr/>
+          <p:nvPr/>
+        </p:nvSpPr>
+        <p:spPr>
+          <a:xfrm>
+            <a:off x="8321040" y="4846320"/>
+            <a:ext cx="192024" cy="64008"/>
+          </a:xfrm>
+          <a:prstGeom prst="rect">
+            <a:avLst>
+              <a:gd name="adj" fmla="val 42857"/>
+            </a:avLst>
+          </a:prstGeom>
+          <a:solidFill>
+            <a:srgbClr val="7A5AA8"/>
+          </a:solidFill>
+          <a:ln w="12700">
+            <a:solidFill>
+              <a:srgbClr val="7A5AA8"/>
+            </a:solidFill>
+            <a:prstDash val="solid"/>
+          </a:ln>
+        </p:spPr>
+      </p:sp>
+      <p:sp>
+        <p:nvSpPr>
+          <p:cNvPr id="3" name="Shape 1"/>
+          <p:cNvSpPr/>
+          <p:nvPr/>
+        </p:nvSpPr>
+        <p:spPr>
+          <a:xfrm>
+            <a:off x="8366760" y="4764024"/>
+            <a:ext cx="192024" cy="64008"/>
+          </a:xfrm>
+          <a:prstGeom prst="rect">
+            <a:avLst>
+              <a:gd name="adj" fmla="val 42857"/>
+            </a:avLst>
+          </a:prstGeom>
+          <a:solidFill>
+            <a:srgbClr val="3B1F5E"/>
+          </a:solidFill>
+          <a:ln w="12700">
+            <a:solidFill>
+              <a:srgbClr val="3B1F5E"/>
+            </a:solidFill>
+            <a:prstDash val="solid"/>
+          </a:ln>
+        </p:spPr>
+      </p:sp>
+      <p:sp>
+        <p:nvSpPr>
+          <p:cNvPr id="4" name="Shape 2"/>
+          <p:cNvSpPr/>
+          <p:nvPr/>
+        </p:nvSpPr>
+        <p:spPr>
+          <a:xfrm>
+            <a:off x="8412480" y="4681728"/>
+            <a:ext cx="192024" cy="64008"/>
+          </a:xfrm>
+          <a:prstGeom prst="rect">
+            <a:avLst>
+              <a:gd name="adj" fmla="val 42857"/>
+            </a:avLst>
+          </a:prstGeom>
+          <a:solidFill>
+            <a:srgbClr val="3B1F5E"/>
+          </a:solidFill>
+          <a:ln w="12700">
+            <a:solidFill>
+              <a:srgbClr val="3B1F5E"/>
+            </a:solidFill>
+            <a:prstDash val="solid"/>
+          </a:ln>
+        </p:spPr>
+      </p:sp>
+      <p:sp>
+        <p:nvSpPr>
+          <p:cNvPr id="5" name="Shape 3"/>
+          <p:cNvSpPr/>
+          <p:nvPr/>
+        </p:nvSpPr>
+        <p:spPr>
+          <a:xfrm>
+            <a:off x="8604504" y="4864608"/>
+            <a:ext cx="59436" cy="59436"/>
+          </a:xfrm>
+          <a:prstGeom prst="rect">
+            <a:avLst>
+              <a:gd name="adj" fmla="val 50000"/>
+            </a:avLst>
+          </a:prstGeom>
+          <a:solidFill>
+            <a:srgbClr val="FFC83D"/>
+          </a:solidFill>
+          <a:ln w="12700">
+            <a:solidFill>
+              <a:srgbClr val="FFC83D"/>
+            </a:solidFill>
+            <a:prstDash val="solid"/>
+          </a:ln>
+        </p:spPr>
+      </p:sp>
+    </p:spTree>
+  </p:cSld>
+  <p:clrMapOvr>
+    <a:masterClrMapping/>
+  </p:clrMapOvr>
+</p:sldLayout>
+</file>
+
+<file path=ppt/slideLayouts/slideLayout3.xml><?xml version="1.0" encoding="utf-8"?>
+<p:sldLayout xmlns:a="http://schemas.openxmlformats.org/drawingml/2006/main" xmlns:r="http://schemas.openxmlformats.org/officeDocument/2006/relationships" xmlns:p="http://schemas.openxmlformats.org/presentationml/2006/main" preserve="1">
+  <p:cSld name="ESCURO">
+    <p:bg>
+      <p:bgPr>
+        <a:solidFill>
+          <a:srgbClr val="3B1F5E"/>
+        </a:solidFill>
+      </p:bgPr>
+    </p:bg>
+    <p:spTree>
+      <p:nvGrpSpPr>
+        <p:cNvPr id="1" name=""/>
+        <p:cNvGrpSpPr/>
+        <p:nvPr/>
+      </p:nvGrpSpPr>
+      <p:grpSpPr>
+        <a:xfrm>
+          <a:off x="0" y="0"/>
+          <a:ext cx="0" cy="0"/>
+          <a:chOff x="0" y="0"/>
+          <a:chExt cx="0" cy="0"/>
+        </a:xfrm>
+      </p:grpSpPr>
+      <p:sp>
+        <p:nvSpPr>
+          <p:cNvPr id="2" name="Shape 0"/>
+          <p:cNvSpPr/>
+          <p:nvPr/>
+        </p:nvSpPr>
+        <p:spPr>
+          <a:xfrm>
+            <a:off x="8321040" y="4846320"/>
+            <a:ext cx="192024" cy="64008"/>
+          </a:xfrm>
+          <a:prstGeom prst="rect">
+            <a:avLst>
+              <a:gd name="adj" fmla="val 42857"/>
+            </a:avLst>
+          </a:prstGeom>
+          <a:solidFill>
+            <a:srgbClr val="B89BE0"/>
+          </a:solidFill>
+          <a:ln w="12700">
+            <a:solidFill>
+              <a:srgbClr val="B89BE0"/>
+            </a:solidFill>
+            <a:prstDash val="solid"/>
+          </a:ln>
+        </p:spPr>
+      </p:sp>
+      <p:sp>
+        <p:nvSpPr>
+          <p:cNvPr id="3" name="Shape 1"/>
+          <p:cNvSpPr/>
+          <p:nvPr/>
+        </p:nvSpPr>
+        <p:spPr>
+          <a:xfrm>
+            <a:off x="8366760" y="4764024"/>
+            <a:ext cx="192024" cy="64008"/>
+          </a:xfrm>
+          <a:prstGeom prst="rect">
+            <a:avLst>
+              <a:gd name="adj" fmla="val 42857"/>
+            </a:avLst>
+          </a:prstGeom>
+          <a:solidFill>
+            <a:srgbClr val="FFFFFF"/>
+          </a:solidFill>
+          <a:ln w="12700">
+            <a:solidFill>
+              <a:srgbClr val="FFFFFF"/>
+            </a:solidFill>
+            <a:prstDash val="solid"/>
+          </a:ln>
+        </p:spPr>
+      </p:sp>
+      <p:sp>
+        <p:nvSpPr>
+          <p:cNvPr id="4" name="Shape 2"/>
+          <p:cNvSpPr/>
+          <p:nvPr/>
+        </p:nvSpPr>
+        <p:spPr>
+          <a:xfrm>
+            <a:off x="8412480" y="4681728"/>
+            <a:ext cx="192024" cy="64008"/>
+          </a:xfrm>
+          <a:prstGeom prst="rect">
+            <a:avLst>
+              <a:gd name="adj" fmla="val 42857"/>
+            </a:avLst>
+          </a:prstGeom>
+          <a:solidFill>
+            <a:srgbClr val="FFFFFF"/>
+          </a:solidFill>
+          <a:ln w="12700">
+            <a:solidFill>
+              <a:srgbClr val="FFFFFF"/>
+            </a:solidFill>
+            <a:prstDash val="solid"/>
+          </a:ln>
+        </p:spPr>
+      </p:sp>
+      <p:sp>
+        <p:nvSpPr>
+          <p:cNvPr id="5" name="Shape 3"/>
+          <p:cNvSpPr/>
+          <p:nvPr/>
+        </p:nvSpPr>
+        <p:spPr>
+          <a:xfrm>
+            <a:off x="8604504" y="4864608"/>
+            <a:ext cx="59436" cy="59436"/>
+          </a:xfrm>
+          <a:prstGeom prst="rect">
+            <a:avLst>
+              <a:gd name="adj" fmla="val 50000"/>
+            </a:avLst>
+          </a:prstGeom>
+          <a:solidFill>
+            <a:srgbClr val="FFC83D"/>
+          </a:solidFill>
+          <a:ln w="12700">
+            <a:solidFill>
+              <a:srgbClr val="FFC83D"/>
+            </a:solidFill>
+            <a:prstDash val="solid"/>
+          </a:ln>
+        </p:spPr>
+      </p:sp>
+    </p:spTree>
+  </p:cSld>
+  <p:clrMapOvr>
+    <a:masterClrMapping/>
+  </p:clrMapOvr>
+</p:sldLayout>
+</file>
+
 <file path=ppt/slideMasters/slideMaster1.xml><?xml version="1.0" encoding="utf-8"?>
 <p:sldMaster xmlns:a="http://schemas.openxmlformats.org/drawingml/2006/main" xmlns:r="http://schemas.openxmlformats.org/officeDocument/2006/relationships" xmlns:p="http://schemas.openxmlformats.org/presentationml/2006/main">
   <p:cSld>
@@ -1397,6 +1677,8 @@
   <p:clrMap bg1="lt1" tx1="dk1" bg2="lt2" tx2="dk2" accent1="accent1" accent2="accent2" accent3="accent3" accent4="accent4" accent5="accent5" accent6="accent6" hlink="hlink" folHlink="folHlink"/>
   <p:sldLayoutIdLst>
     <p:sldLayoutId id="2147483649" r:id="rId1"/>
+    <p:sldLayoutId id="2147483650" r:id="rId2"/>
+    <p:sldLayoutId id="2147483651" r:id="rId3"/>
   </p:sldLayoutIdLst>
   <p:hf sldNum="0" hdr="0" ftr="0" dt="0"/>
   <p:txStyles>
@@ -1655,13 +1937,6 @@
 <file path=ppt/slides/slide1.xml><?xml version="1.0" encoding="utf-8"?>
 <p:sld xmlns:a="http://schemas.openxmlformats.org/drawingml/2006/main" xmlns:r="http://schemas.openxmlformats.org/officeDocument/2006/relationships" xmlns:p="http://schemas.openxmlformats.org/presentationml/2006/main">
   <p:cSld name="Slide 1">
-    <p:bg>
-      <p:bgPr>
-        <a:solidFill>
-          <a:srgbClr val="3B1F5E"/>
-        </a:solidFill>
-      </p:bgPr>
-    </p:bg>
     <p:spTree>
       <p:nvGrpSpPr>
         <p:cNvPr id="1" name=""/>
@@ -1678,113 +1953,7 @@
       </p:grpSpPr>
       <p:sp>
         <p:nvSpPr>
-          <p:cNvPr id="2" name="Shape 0"/>
-          <p:cNvSpPr/>
-          <p:nvPr/>
-        </p:nvSpPr>
-        <p:spPr>
-          <a:xfrm>
-            <a:off x="457200" y="822960"/>
-            <a:ext cx="384048" cy="128016"/>
-          </a:xfrm>
-          <a:prstGeom prst="roundRect">
-            <a:avLst>
-              <a:gd name="adj" fmla="val 42857"/>
-            </a:avLst>
-          </a:prstGeom>
-          <a:solidFill>
-            <a:srgbClr val="B89BE0"/>
-          </a:solidFill>
-          <a:ln w="12700">
-            <a:solidFill>
-              <a:srgbClr val="B89BE0"/>
-            </a:solidFill>
-            <a:prstDash val="solid"/>
-          </a:ln>
-        </p:spPr>
-      </p:sp>
-      <p:sp>
-        <p:nvSpPr>
-          <p:cNvPr id="3" name="Shape 1"/>
-          <p:cNvSpPr/>
-          <p:nvPr/>
-        </p:nvSpPr>
-        <p:spPr>
-          <a:xfrm>
-            <a:off x="548640" y="658368"/>
-            <a:ext cx="384048" cy="128016"/>
-          </a:xfrm>
-          <a:prstGeom prst="roundRect">
-            <a:avLst>
-              <a:gd name="adj" fmla="val 42857"/>
-            </a:avLst>
-          </a:prstGeom>
-          <a:solidFill>
-            <a:srgbClr val="FFFFFF"/>
-          </a:solidFill>
-          <a:ln w="12700">
-            <a:solidFill>
-              <a:srgbClr val="FFFFFF"/>
-            </a:solidFill>
-            <a:prstDash val="solid"/>
-          </a:ln>
-        </p:spPr>
-      </p:sp>
-      <p:sp>
-        <p:nvSpPr>
-          <p:cNvPr id="4" name="Shape 2"/>
-          <p:cNvSpPr/>
-          <p:nvPr/>
-        </p:nvSpPr>
-        <p:spPr>
-          <a:xfrm>
-            <a:off x="640080" y="493776"/>
-            <a:ext cx="384048" cy="128016"/>
-          </a:xfrm>
-          <a:prstGeom prst="roundRect">
-            <a:avLst>
-              <a:gd name="adj" fmla="val 42857"/>
-            </a:avLst>
-          </a:prstGeom>
-          <a:solidFill>
-            <a:srgbClr val="FFFFFF"/>
-          </a:solidFill>
-          <a:ln w="12700">
-            <a:solidFill>
-              <a:srgbClr val="FFFFFF"/>
-            </a:solidFill>
-            <a:prstDash val="solid"/>
-          </a:ln>
-        </p:spPr>
-      </p:sp>
-      <p:sp>
-        <p:nvSpPr>
-          <p:cNvPr id="5" name="Shape 3"/>
-          <p:cNvSpPr/>
-          <p:nvPr/>
-        </p:nvSpPr>
-        <p:spPr>
-          <a:xfrm>
-            <a:off x="1024128" y="859536"/>
-            <a:ext cx="118872" cy="118872"/>
-          </a:xfrm>
-          <a:prstGeom prst="ellipse">
-            <a:avLst/>
-          </a:prstGeom>
-          <a:solidFill>
-            <a:srgbClr val="FFC83D"/>
-          </a:solidFill>
-          <a:ln w="12700">
-            <a:solidFill>
-              <a:srgbClr val="FFC83D"/>
-            </a:solidFill>
-            <a:prstDash val="solid"/>
-          </a:ln>
-        </p:spPr>
-      </p:sp>
-      <p:sp>
-        <p:nvSpPr>
-          <p:cNvPr id="6" name="Text 4"/>
+          <p:cNvPr id="2" name="Text 0"/>
           <p:cNvSpPr txBox="1"/>
           <p:nvPr/>
         </p:nvSpPr>
@@ -1825,7 +1994,7 @@
       </p:sp>
       <p:sp>
         <p:nvSpPr>
-          <p:cNvPr id="7" name="Text 5"/>
+          <p:cNvPr id="3" name="Text 1"/>
           <p:cNvSpPr txBox="1"/>
           <p:nvPr/>
         </p:nvSpPr>
@@ -1856,7 +2025,7 @@
                 <a:ea typeface="Arial" pitchFamily="34" charset="-122"/>
                 <a:cs typeface="Arial" pitchFamily="34" charset="-120"/>
               </a:rPr>
-              <a:t>Loja Verde Comércio · demanda contratual com fornecedor · 15 de setembro de 2026</a:t>
+              <a:t>[Nome do cliente] · discussão sobre contrato de prestação de serviços · 14 de setembro de 2026</a:t>
             </a:r>
             <a:endParaRPr lang="en-US" sz="1600" dirty="0"/>
           </a:p>
@@ -1864,14 +2033,14 @@
       </p:sp>
       <p:sp>
         <p:nvSpPr>
-          <p:cNvPr id="8" name="Text 6"/>
+          <p:cNvPr id="4" name="Text 2"/>
           <p:cNvSpPr txBox="1"/>
           <p:nvPr/>
         </p:nvSpPr>
         <p:spPr>
           <a:xfrm>
             <a:off x="457200" y="3291840"/>
-            <a:ext cx="7772400" cy="640080"/>
+            <a:ext cx="7772400" cy="822960"/>
           </a:xfrm>
           <a:prstGeom prst="rect">
             <a:avLst/>
@@ -1880,7 +2049,7 @@
           <a:ln/>
         </p:spPr>
         <p:txBody>
-          <a:bodyPr wrap="square" lIns="0" tIns="0" rIns="0" bIns="0" rtlCol="0" anchor="ctr"/>
+          <a:bodyPr wrap="square" lIns="0" tIns="0" rIns="0" bIns="0" rtlCol="0" anchor="t"/>
           <a:lstStyle/>
           <a:p>
             <a:pPr indent="0" marL="0">
@@ -1895,156 +2064,11 @@
                 <a:ea typeface="Arial" pitchFamily="34" charset="-122"/>
                 <a:cs typeface="Arial" pitchFamily="34" charset="-120"/>
               </a:rPr>
-              <a:t>Preparada por Ferraz &amp; Lima Advocacia (exemplo fictício). Válida até 30 de setembro de 2026.</a:t>
+              <a:t>Preparada por Ferraz &amp; Lima Advocacia (exemplo fictício). Proposta nº 2026-023, válida por 15 dias, até 29 de setembro de 2026.</a:t>
             </a:r>
             <a:endParaRPr lang="en-US" sz="1400" dirty="0"/>
           </a:p>
         </p:txBody>
-      </p:sp>
-      <p:sp>
-        <p:nvSpPr>
-          <p:cNvPr id="9" name="Text 7"/>
-          <p:cNvSpPr txBox="1"/>
-          <p:nvPr/>
-        </p:nvSpPr>
-        <p:spPr>
-          <a:xfrm>
-            <a:off x="457200" y="4791456"/>
-            <a:ext cx="6858000" cy="201168"/>
-          </a:xfrm>
-          <a:prstGeom prst="rect">
-            <a:avLst/>
-          </a:prstGeom>
-          <a:noFill/>
-          <a:ln/>
-        </p:spPr>
-        <p:txBody>
-          <a:bodyPr wrap="square" lIns="0" tIns="0" rIns="0" bIns="0" rtlCol="0" anchor="ctr"/>
-          <a:lstStyle/>
-          <a:p>
-            <a:pPr indent="0" marL="0">
-              <a:buNone/>
-            </a:pPr>
-            <a:r>
-              <a:rPr lang="en-US" sz="700" dirty="0">
-                <a:solidFill>
-                  <a:srgbClr val="7A5AA8"/>
-                </a:solidFill>
-                <a:latin typeface="Arial" pitchFamily="34" charset="0"/>
-                <a:ea typeface="Arial" pitchFamily="34" charset="-122"/>
-                <a:cs typeface="Arial" pitchFamily="34" charset="-120"/>
-              </a:rPr>
-              <a:t>Kit de Gestão para Advogados · modelo v1.0 · set/2026</a:t>
-            </a:r>
-            <a:endParaRPr lang="en-US" sz="700" dirty="0"/>
-          </a:p>
-        </p:txBody>
-      </p:sp>
-      <p:sp>
-        <p:nvSpPr>
-          <p:cNvPr id="10" name="Shape 8"/>
-          <p:cNvSpPr/>
-          <p:nvPr/>
-        </p:nvSpPr>
-        <p:spPr>
-          <a:xfrm>
-            <a:off x="8229600" y="4818888"/>
-            <a:ext cx="211226" cy="70409"/>
-          </a:xfrm>
-          <a:prstGeom prst="roundRect">
-            <a:avLst>
-              <a:gd name="adj" fmla="val 42857"/>
-            </a:avLst>
-          </a:prstGeom>
-          <a:solidFill>
-            <a:srgbClr val="B89BE0"/>
-          </a:solidFill>
-          <a:ln w="12700">
-            <a:solidFill>
-              <a:srgbClr val="B89BE0"/>
-            </a:solidFill>
-            <a:prstDash val="solid"/>
-          </a:ln>
-        </p:spPr>
-      </p:sp>
-      <p:sp>
-        <p:nvSpPr>
-          <p:cNvPr id="11" name="Shape 9"/>
-          <p:cNvSpPr/>
-          <p:nvPr/>
-        </p:nvSpPr>
-        <p:spPr>
-          <a:xfrm>
-            <a:off x="8279892" y="4728362"/>
-            <a:ext cx="211226" cy="70409"/>
-          </a:xfrm>
-          <a:prstGeom prst="roundRect">
-            <a:avLst>
-              <a:gd name="adj" fmla="val 42857"/>
-            </a:avLst>
-          </a:prstGeom>
-          <a:solidFill>
-            <a:srgbClr val="FFFFFF"/>
-          </a:solidFill>
-          <a:ln w="12700">
-            <a:solidFill>
-              <a:srgbClr val="FFFFFF"/>
-            </a:solidFill>
-            <a:prstDash val="solid"/>
-          </a:ln>
-        </p:spPr>
-      </p:sp>
-      <p:sp>
-        <p:nvSpPr>
-          <p:cNvPr id="12" name="Shape 10"/>
-          <p:cNvSpPr/>
-          <p:nvPr/>
-        </p:nvSpPr>
-        <p:spPr>
-          <a:xfrm>
-            <a:off x="8330184" y="4637837"/>
-            <a:ext cx="211226" cy="70409"/>
-          </a:xfrm>
-          <a:prstGeom prst="roundRect">
-            <a:avLst>
-              <a:gd name="adj" fmla="val 42857"/>
-            </a:avLst>
-          </a:prstGeom>
-          <a:solidFill>
-            <a:srgbClr val="FFFFFF"/>
-          </a:solidFill>
-          <a:ln w="12700">
-            <a:solidFill>
-              <a:srgbClr val="FFFFFF"/>
-            </a:solidFill>
-            <a:prstDash val="solid"/>
-          </a:ln>
-        </p:spPr>
-      </p:sp>
-      <p:sp>
-        <p:nvSpPr>
-          <p:cNvPr id="13" name="Shape 11"/>
-          <p:cNvSpPr/>
-          <p:nvPr/>
-        </p:nvSpPr>
-        <p:spPr>
-          <a:xfrm>
-            <a:off x="8541410" y="4839005"/>
-            <a:ext cx="65380" cy="65380"/>
-          </a:xfrm>
-          <a:prstGeom prst="ellipse">
-            <a:avLst/>
-          </a:prstGeom>
-          <a:solidFill>
-            <a:srgbClr val="FFC83D"/>
-          </a:solidFill>
-          <a:ln w="12700">
-            <a:solidFill>
-              <a:srgbClr val="FFC83D"/>
-            </a:solidFill>
-            <a:prstDash val="solid"/>
-          </a:ln>
-        </p:spPr>
       </p:sp>
     </p:spTree>
   </p:cSld>
@@ -2057,13 +2081,6 @@
 <file path=ppt/slides/slide10.xml><?xml version="1.0" encoding="utf-8"?>
 <p:sld xmlns:a="http://schemas.openxmlformats.org/drawingml/2006/main" xmlns:r="http://schemas.openxmlformats.org/officeDocument/2006/relationships" xmlns:p="http://schemas.openxmlformats.org/presentationml/2006/main">
   <p:cSld name="Slide 10">
-    <p:bg>
-      <p:bgPr>
-        <a:solidFill>
-          <a:srgbClr val="3B1F5E"/>
-        </a:solidFill>
-      </p:bgPr>
-    </p:bg>
     <p:spTree>
       <p:nvGrpSpPr>
         <p:cNvPr id="1" name=""/>
@@ -2128,7 +2145,7 @@
         <p:spPr>
           <a:xfrm>
             <a:off x="457200" y="1554480"/>
-            <a:ext cx="8229600" cy="2743200"/>
+            <a:ext cx="7772400" cy="2651760"/>
           </a:xfrm>
           <a:prstGeom prst="rect">
             <a:avLst/>
@@ -2142,13 +2159,13 @@
           <a:p>
             <a:pPr marL="342900" indent="-342900">
               <a:spcAft>
-                <a:spcPts val="1000"/>
+                <a:spcPts val="800"/>
               </a:spcAft>
               <a:buSzPct val="100000"/>
               <a:buChar char="•"/>
             </a:pPr>
             <a:r>
-              <a:rPr lang="en-US" sz="1600" dirty="0">
+              <a:rPr lang="en-US" sz="1500" dirty="0">
                 <a:solidFill>
                   <a:srgbClr val="FFFFFF"/>
                 </a:solidFill>
@@ -2156,20 +2173,20 @@
                 <a:ea typeface="Arial" pitchFamily="34" charset="-122"/>
                 <a:cs typeface="Arial" pitchFamily="34" charset="-120"/>
               </a:rPr>
-              <a:t>Marina Ferraz · sócia responsável · marina@ferrazlima.exemplo · (11) 9 0000-0000</a:t>
-            </a:r>
-            <a:endParaRPr lang="en-US" sz="1600" dirty="0"/>
+              <a:t>Marina Ferraz · sócia responsável · [e-mail] · [telefone]</a:t>
+            </a:r>
+            <a:endParaRPr lang="en-US" sz="1500" dirty="0"/>
           </a:p>
           <a:p>
             <a:pPr marL="342900" indent="-342900">
               <a:spcAft>
-                <a:spcPts val="1000"/>
+                <a:spcPts val="800"/>
               </a:spcAft>
               <a:buSzPct val="100000"/>
               <a:buChar char="•"/>
             </a:pPr>
             <a:r>
-              <a:rPr lang="en-US" sz="1600" dirty="0">
+              <a:rPr lang="en-US" sz="1500" dirty="0">
                 <a:solidFill>
                   <a:srgbClr val="FFFFFF"/>
                 </a:solidFill>
@@ -2177,20 +2194,20 @@
                 <a:ea typeface="Arial" pitchFamily="34" charset="-122"/>
                 <a:cs typeface="Arial" pitchFamily="34" charset="-120"/>
               </a:rPr>
-              <a:t>Rafael Lima · sócio · rafael@ferrazlima.exemplo · (11) 9 0000-0001</a:t>
-            </a:r>
-            <a:endParaRPr lang="en-US" sz="1600" dirty="0"/>
+              <a:t>Rafael Lima · sócio · [e-mail] · [telefone]</a:t>
+            </a:r>
+            <a:endParaRPr lang="en-US" sz="1500" dirty="0"/>
           </a:p>
           <a:p>
             <a:pPr marL="342900" indent="-342900">
               <a:spcAft>
-                <a:spcPts val="1000"/>
+                <a:spcPts val="800"/>
               </a:spcAft>
               <a:buSzPct val="100000"/>
               <a:buChar char="•"/>
             </a:pPr>
             <a:r>
-              <a:rPr lang="en-US" sz="1600" dirty="0">
+              <a:rPr lang="en-US" sz="1500" dirty="0">
                 <a:solidFill>
                   <a:srgbClr val="FFFFFF"/>
                 </a:solidFill>
@@ -2198,9 +2215,9 @@
                 <a:ea typeface="Arial" pitchFamily="34" charset="-122"/>
                 <a:cs typeface="Arial" pitchFamily="34" charset="-120"/>
               </a:rPr>
-              <a:t>Ferraz &amp; Lima Advocacia · Rua Exemplo, 100 · São Paulo · seg. a sex., 9h às 18h</a:t>
-            </a:r>
-            <a:endParaRPr lang="en-US" sz="1600" dirty="0"/>
+              <a:t>Ferraz &amp; Lima Advocacia · [endereço] · seg. a sex., 9h às 18h</a:t>
+            </a:r>
+            <a:endParaRPr lang="en-US" sz="1500" dirty="0"/>
           </a:p>
         </p:txBody>
       </p:sp>
@@ -2212,8 +2229,8 @@
         </p:nvSpPr>
         <p:spPr>
           <a:xfrm>
-            <a:off x="457200" y="4791456"/>
-            <a:ext cx="6858000" cy="201168"/>
+            <a:off x="457200" y="4114800"/>
+            <a:ext cx="8229600" cy="548640"/>
           </a:xfrm>
           <a:prstGeom prst="rect">
             <a:avLst/>
@@ -2222,158 +2239,13 @@
           <a:ln/>
         </p:spPr>
         <p:txBody>
-          <a:bodyPr wrap="square" lIns="0" tIns="0" rIns="0" bIns="0" rtlCol="0" anchor="ctr"/>
+          <a:bodyPr wrap="square" lIns="0" tIns="0" rIns="0" bIns="0" rtlCol="0" anchor="t"/>
           <a:lstStyle/>
           <a:p>
             <a:pPr indent="0" marL="0">
               <a:buNone/>
             </a:pPr>
             <a:r>
-              <a:rPr lang="en-US" sz="700" dirty="0">
-                <a:solidFill>
-                  <a:srgbClr val="7A5AA8"/>
-                </a:solidFill>
-                <a:latin typeface="Arial" pitchFamily="34" charset="0"/>
-                <a:ea typeface="Arial" pitchFamily="34" charset="-122"/>
-                <a:cs typeface="Arial" pitchFamily="34" charset="-120"/>
-              </a:rPr>
-              <a:t>Kit de Gestão para Advogados · modelo v1.0 · set/2026</a:t>
-            </a:r>
-            <a:endParaRPr lang="en-US" sz="700" dirty="0"/>
-          </a:p>
-        </p:txBody>
-      </p:sp>
-      <p:sp>
-        <p:nvSpPr>
-          <p:cNvPr id="5" name="Shape 3"/>
-          <p:cNvSpPr/>
-          <p:nvPr/>
-        </p:nvSpPr>
-        <p:spPr>
-          <a:xfrm>
-            <a:off x="8229600" y="4818888"/>
-            <a:ext cx="211226" cy="70409"/>
-          </a:xfrm>
-          <a:prstGeom prst="roundRect">
-            <a:avLst>
-              <a:gd name="adj" fmla="val 42857"/>
-            </a:avLst>
-          </a:prstGeom>
-          <a:solidFill>
-            <a:srgbClr val="B89BE0"/>
-          </a:solidFill>
-          <a:ln w="12700">
-            <a:solidFill>
-              <a:srgbClr val="B89BE0"/>
-            </a:solidFill>
-            <a:prstDash val="solid"/>
-          </a:ln>
-        </p:spPr>
-      </p:sp>
-      <p:sp>
-        <p:nvSpPr>
-          <p:cNvPr id="6" name="Shape 4"/>
-          <p:cNvSpPr/>
-          <p:nvPr/>
-        </p:nvSpPr>
-        <p:spPr>
-          <a:xfrm>
-            <a:off x="8279892" y="4728362"/>
-            <a:ext cx="211226" cy="70409"/>
-          </a:xfrm>
-          <a:prstGeom prst="roundRect">
-            <a:avLst>
-              <a:gd name="adj" fmla="val 42857"/>
-            </a:avLst>
-          </a:prstGeom>
-          <a:solidFill>
-            <a:srgbClr val="FFFFFF"/>
-          </a:solidFill>
-          <a:ln w="12700">
-            <a:solidFill>
-              <a:srgbClr val="FFFFFF"/>
-            </a:solidFill>
-            <a:prstDash val="solid"/>
-          </a:ln>
-        </p:spPr>
-      </p:sp>
-      <p:sp>
-        <p:nvSpPr>
-          <p:cNvPr id="7" name="Shape 5"/>
-          <p:cNvSpPr/>
-          <p:nvPr/>
-        </p:nvSpPr>
-        <p:spPr>
-          <a:xfrm>
-            <a:off x="8330184" y="4637837"/>
-            <a:ext cx="211226" cy="70409"/>
-          </a:xfrm>
-          <a:prstGeom prst="roundRect">
-            <a:avLst>
-              <a:gd name="adj" fmla="val 42857"/>
-            </a:avLst>
-          </a:prstGeom>
-          <a:solidFill>
-            <a:srgbClr val="FFFFFF"/>
-          </a:solidFill>
-          <a:ln w="12700">
-            <a:solidFill>
-              <a:srgbClr val="FFFFFF"/>
-            </a:solidFill>
-            <a:prstDash val="solid"/>
-          </a:ln>
-        </p:spPr>
-      </p:sp>
-      <p:sp>
-        <p:nvSpPr>
-          <p:cNvPr id="8" name="Shape 6"/>
-          <p:cNvSpPr/>
-          <p:nvPr/>
-        </p:nvSpPr>
-        <p:spPr>
-          <a:xfrm>
-            <a:off x="8541410" y="4839005"/>
-            <a:ext cx="65380" cy="65380"/>
-          </a:xfrm>
-          <a:prstGeom prst="ellipse">
-            <a:avLst/>
-          </a:prstGeom>
-          <a:solidFill>
-            <a:srgbClr val="FFC83D"/>
-          </a:solidFill>
-          <a:ln w="12700">
-            <a:solidFill>
-              <a:srgbClr val="FFC83D"/>
-            </a:solidFill>
-            <a:prstDash val="solid"/>
-          </a:ln>
-        </p:spPr>
-      </p:sp>
-      <p:sp>
-        <p:nvSpPr>
-          <p:cNvPr id="9" name="Text 7"/>
-          <p:cNvSpPr txBox="1"/>
-          <p:nvPr/>
-        </p:nvSpPr>
-        <p:spPr>
-          <a:xfrm>
-            <a:off x="457200" y="4114800"/>
-            <a:ext cx="8229600" cy="365760"/>
-          </a:xfrm>
-          <a:prstGeom prst="rect">
-            <a:avLst/>
-          </a:prstGeom>
-          <a:noFill/>
-          <a:ln/>
-        </p:spPr>
-        <p:txBody>
-          <a:bodyPr wrap="square" lIns="0" tIns="0" rIns="0" bIns="0" rtlCol="0" anchor="ctr"/>
-          <a:lstStyle/>
-          <a:p>
-            <a:pPr indent="0" marL="0">
-              <a:buNone/>
-            </a:pPr>
-            <a:r>
               <a:rPr lang="en-US" sz="1100" dirty="0">
                 <a:solidFill>
                   <a:srgbClr val="B89BE0"/>
@@ -2382,7 +2254,7 @@
                 <a:ea typeface="Arial" pitchFamily="34" charset="-122"/>
                 <a:cs typeface="Arial" pitchFamily="34" charset="-120"/>
               </a:rPr>
-              <a:t>Dados fictícios. Esta apresentação acompanha a proposta; as condições finais ficam no contrato de honorários.</a:t>
+              <a:t>Troque os colchetes pelos dados reais antes de enviar. Esta apresentação acompanha a proposta em PDF; as condições finais ficam no contrato de honorários.</a:t>
             </a:r>
             <a:endParaRPr lang="en-US" sz="1100" dirty="0"/>
           </a:p>
@@ -2399,13 +2271,6 @@
 <file path=ppt/slides/slide2.xml><?xml version="1.0" encoding="utf-8"?>
 <p:sld xmlns:a="http://schemas.openxmlformats.org/drawingml/2006/main" xmlns:r="http://schemas.openxmlformats.org/officeDocument/2006/relationships" xmlns:p="http://schemas.openxmlformats.org/presentationml/2006/main">
   <p:cSld name="Slide 2">
-    <p:bg>
-      <p:bgPr>
-        <a:solidFill>
-          <a:srgbClr val="FFFFFF"/>
-        </a:solidFill>
-      </p:bgPr>
-    </p:bg>
     <p:spTree>
       <p:nvGrpSpPr>
         <p:cNvPr id="1" name=""/>
@@ -2537,7 +2402,7 @@
                 <a:ea typeface="Arial" pitchFamily="34" charset="-122"/>
                 <a:cs typeface="Arial" pitchFamily="34" charset="-120"/>
               </a:rPr>
-              <a:t>A Loja Verde tem uma divergência com um fornecedor sobre entregas e valores de um contrato de 2025; os documentos já estão reunidos pela empresa.</a:t>
+              <a:t>[Nome do cliente] tem uma divergência com [a outra parte] sobre um contrato de prestação de serviços; os documentos já estão reunidos.</a:t>
             </a:r>
             <a:endParaRPr lang="en-US" sz="1350" dirty="0"/>
           </a:p>
@@ -2558,7 +2423,7 @@
                 <a:ea typeface="Arial" pitchFamily="34" charset="-122"/>
                 <a:cs typeface="Arial" pitchFamily="34" charset="-120"/>
               </a:rPr>
-              <a:t>A empresa quer tentar primeiro um acordo e, se não houver, seguir com a demanda.</a:t>
+              <a:t>O que se quer: [tentar primeiro um acordo e, se não houver, seguir com a discussão até a decisão].</a:t>
             </a:r>
             <a:endParaRPr lang="en-US" sz="1350" dirty="0"/>
           </a:p>
@@ -2579,7 +2444,7 @@
                 <a:ea typeface="Arial" pitchFamily="34" charset="-122"/>
                 <a:cs typeface="Arial" pitchFamily="34" charset="-120"/>
               </a:rPr>
-              <a:t>O que importa para vocês: previsibilidade de custo, um retorno mensal sobre o andamento e alguém que fale com o fornecedor no lugar da empresa.</a:t>
+              <a:t>O que importa para você: previsibilidade de custo, retorno periódico sobre o andamento e alguém que fale com a outra parte no seu lugar.</a:t>
             </a:r>
             <a:endParaRPr lang="en-US" sz="1350" dirty="0"/>
           </a:p>
@@ -2600,156 +2465,11 @@
                 <a:ea typeface="Arial" pitchFamily="34" charset="-122"/>
                 <a:cs typeface="Arial" pitchFamily="34" charset="-120"/>
               </a:rPr>
-              <a:t>Fora deste escopo: outros contratos e a rotina societária da empresa (proposta à parte, se quiserem).</a:t>
+              <a:t>Fora deste escopo: [outros contratos e assuntos] (proposta à parte, se quiser).</a:t>
             </a:r>
             <a:endParaRPr lang="en-US" sz="1350" dirty="0"/>
           </a:p>
         </p:txBody>
-      </p:sp>
-      <p:sp>
-        <p:nvSpPr>
-          <p:cNvPr id="5" name="Text 3"/>
-          <p:cNvSpPr txBox="1"/>
-          <p:nvPr/>
-        </p:nvSpPr>
-        <p:spPr>
-          <a:xfrm>
-            <a:off x="457200" y="4791456"/>
-            <a:ext cx="6858000" cy="201168"/>
-          </a:xfrm>
-          <a:prstGeom prst="rect">
-            <a:avLst/>
-          </a:prstGeom>
-          <a:noFill/>
-          <a:ln/>
-        </p:spPr>
-        <p:txBody>
-          <a:bodyPr wrap="square" lIns="0" tIns="0" rIns="0" bIns="0" rtlCol="0" anchor="ctr"/>
-          <a:lstStyle/>
-          <a:p>
-            <a:pPr indent="0" marL="0">
-              <a:buNone/>
-            </a:pPr>
-            <a:r>
-              <a:rPr lang="en-US" sz="700" dirty="0">
-                <a:solidFill>
-                  <a:srgbClr val="B89BE0"/>
-                </a:solidFill>
-                <a:latin typeface="Arial" pitchFamily="34" charset="0"/>
-                <a:ea typeface="Arial" pitchFamily="34" charset="-122"/>
-                <a:cs typeface="Arial" pitchFamily="34" charset="-120"/>
-              </a:rPr>
-              <a:t>Kit de Gestão para Advogados · modelo v1.0 · set/2026</a:t>
-            </a:r>
-            <a:endParaRPr lang="en-US" sz="700" dirty="0"/>
-          </a:p>
-        </p:txBody>
-      </p:sp>
-      <p:sp>
-        <p:nvSpPr>
-          <p:cNvPr id="6" name="Shape 4"/>
-          <p:cNvSpPr/>
-          <p:nvPr/>
-        </p:nvSpPr>
-        <p:spPr>
-          <a:xfrm>
-            <a:off x="8229600" y="4818888"/>
-            <a:ext cx="211226" cy="70409"/>
-          </a:xfrm>
-          <a:prstGeom prst="roundRect">
-            <a:avLst>
-              <a:gd name="adj" fmla="val 42857"/>
-            </a:avLst>
-          </a:prstGeom>
-          <a:solidFill>
-            <a:srgbClr val="7A5AA8"/>
-          </a:solidFill>
-          <a:ln w="12700">
-            <a:solidFill>
-              <a:srgbClr val="7A5AA8"/>
-            </a:solidFill>
-            <a:prstDash val="solid"/>
-          </a:ln>
-        </p:spPr>
-      </p:sp>
-      <p:sp>
-        <p:nvSpPr>
-          <p:cNvPr id="7" name="Shape 5"/>
-          <p:cNvSpPr/>
-          <p:nvPr/>
-        </p:nvSpPr>
-        <p:spPr>
-          <a:xfrm>
-            <a:off x="8279892" y="4728362"/>
-            <a:ext cx="211226" cy="70409"/>
-          </a:xfrm>
-          <a:prstGeom prst="roundRect">
-            <a:avLst>
-              <a:gd name="adj" fmla="val 42857"/>
-            </a:avLst>
-          </a:prstGeom>
-          <a:solidFill>
-            <a:srgbClr val="3B1F5E"/>
-          </a:solidFill>
-          <a:ln w="12700">
-            <a:solidFill>
-              <a:srgbClr val="3B1F5E"/>
-            </a:solidFill>
-            <a:prstDash val="solid"/>
-          </a:ln>
-        </p:spPr>
-      </p:sp>
-      <p:sp>
-        <p:nvSpPr>
-          <p:cNvPr id="8" name="Shape 6"/>
-          <p:cNvSpPr/>
-          <p:nvPr/>
-        </p:nvSpPr>
-        <p:spPr>
-          <a:xfrm>
-            <a:off x="8330184" y="4637837"/>
-            <a:ext cx="211226" cy="70409"/>
-          </a:xfrm>
-          <a:prstGeom prst="roundRect">
-            <a:avLst>
-              <a:gd name="adj" fmla="val 42857"/>
-            </a:avLst>
-          </a:prstGeom>
-          <a:solidFill>
-            <a:srgbClr val="3B1F5E"/>
-          </a:solidFill>
-          <a:ln w="12700">
-            <a:solidFill>
-              <a:srgbClr val="3B1F5E"/>
-            </a:solidFill>
-            <a:prstDash val="solid"/>
-          </a:ln>
-        </p:spPr>
-      </p:sp>
-      <p:sp>
-        <p:nvSpPr>
-          <p:cNvPr id="9" name="Shape 7"/>
-          <p:cNvSpPr/>
-          <p:nvPr/>
-        </p:nvSpPr>
-        <p:spPr>
-          <a:xfrm>
-            <a:off x="8541410" y="4839005"/>
-            <a:ext cx="65380" cy="65380"/>
-          </a:xfrm>
-          <a:prstGeom prst="ellipse">
-            <a:avLst/>
-          </a:prstGeom>
-          <a:solidFill>
-            <a:srgbClr val="FFC83D"/>
-          </a:solidFill>
-          <a:ln w="12700">
-            <a:solidFill>
-              <a:srgbClr val="FFC83D"/>
-            </a:solidFill>
-            <a:prstDash val="solid"/>
-          </a:ln>
-        </p:spPr>
       </p:sp>
     </p:spTree>
   </p:cSld>
@@ -2762,13 +2482,6 @@
 <file path=ppt/slides/slide3.xml><?xml version="1.0" encoding="utf-8"?>
 <p:sld xmlns:a="http://schemas.openxmlformats.org/drawingml/2006/main" xmlns:r="http://schemas.openxmlformats.org/officeDocument/2006/relationships" xmlns:p="http://schemas.openxmlformats.org/presentationml/2006/main">
   <p:cSld name="Slide 3">
-    <p:bg>
-      <p:bgPr>
-        <a:solidFill>
-          <a:srgbClr val="FFFFFF"/>
-        </a:solidFill>
-      </p:bgPr>
-    </p:bg>
     <p:spTree>
       <p:nvGrpSpPr>
         <p:cNvPr id="1" name=""/>
@@ -2857,7 +2570,7 @@
                 <a:ea typeface="Arial" pitchFamily="34" charset="-122"/>
                 <a:cs typeface="Arial" pitchFamily="34" charset="-120"/>
               </a:rPr>
-              <a:t>Quatro etapas. Os prazos dependem da outra parte e do andamento: são estimativas, revistas no relatório mensal.</a:t>
+              <a:t>Quatro etapas, as mesmas da proposta em PDF. Os prazos dependem da outra parte e do andamento: são estimativas.</a:t>
             </a:r>
             <a:endParaRPr lang="en-US" sz="1200" dirty="0"/>
           </a:p>
@@ -2938,7 +2651,7 @@
         <p:spPr>
           <a:xfrm>
             <a:off x="640080" y="2240280"/>
-            <a:ext cx="1645920" cy="365760"/>
+            <a:ext cx="1645920" cy="548640"/>
           </a:xfrm>
           <a:prstGeom prst="rect">
             <a:avLst/>
@@ -2947,7 +2660,7 @@
           <a:ln/>
         </p:spPr>
         <p:txBody>
-          <a:bodyPr wrap="square" lIns="0" tIns="0" rIns="0" bIns="0" rtlCol="0" anchor="ctr">
+          <a:bodyPr wrap="square" lIns="0" tIns="0" rIns="0" bIns="0" rtlCol="0" anchor="t">
             <a:normAutofit/>
           </a:bodyPr>
           <a:lstStyle/>
@@ -2956,7 +2669,7 @@
               <a:buNone/>
             </a:pPr>
             <a:r>
-              <a:rPr lang="en-US" sz="1400" b="1" dirty="0">
+              <a:rPr lang="en-US" sz="1300" b="1" dirty="0">
                 <a:solidFill>
                   <a:srgbClr val="3B1F5E"/>
                 </a:solidFill>
@@ -2964,9 +2677,9 @@
                 <a:ea typeface="Arial" pitchFamily="34" charset="-122"/>
                 <a:cs typeface="Arial" pitchFamily="34" charset="-120"/>
               </a:rPr>
-              <a:t>Organizar</a:t>
-            </a:r>
-            <a:endParaRPr lang="en-US" sz="1400" dirty="0"/>
+              <a:t>Análise inicial e planejamento</a:t>
+            </a:r>
+            <a:endParaRPr lang="en-US" sz="1300" dirty="0"/>
           </a:p>
         </p:txBody>
       </p:sp>
@@ -2978,8 +2691,8 @@
         </p:nvSpPr>
         <p:spPr>
           <a:xfrm>
-            <a:off x="640080" y="2606040"/>
-            <a:ext cx="1645920" cy="411480"/>
+            <a:off x="640080" y="2788920"/>
+            <a:ext cx="1645920" cy="320040"/>
           </a:xfrm>
           <a:prstGeom prst="rect">
             <a:avLst/>
@@ -3003,7 +2716,7 @@
                 <a:ea typeface="Arial" pitchFamily="34" charset="-122"/>
                 <a:cs typeface="Arial" pitchFamily="34" charset="-120"/>
               </a:rPr>
-              <a:t>semanas 1 e 2</a:t>
+              <a:t>até 15 dias</a:t>
             </a:r>
             <a:endParaRPr lang="en-US" sz="950" dirty="0"/>
           </a:p>
@@ -3017,8 +2730,8 @@
         </p:nvSpPr>
         <p:spPr>
           <a:xfrm>
-            <a:off x="640080" y="3017520"/>
-            <a:ext cx="1645920" cy="1005840"/>
+            <a:off x="640080" y="3108960"/>
+            <a:ext cx="1645920" cy="960120"/>
           </a:xfrm>
           <a:prstGeom prst="rect">
             <a:avLst/>
@@ -3042,7 +2755,7 @@
                 <a:ea typeface="Arial" pitchFamily="34" charset="-122"/>
                 <a:cs typeface="Arial" pitchFamily="34" charset="-120"/>
               </a:rPr>
-              <a:t>leitura dos documentos, reunião de alinhamento e plano de trabalho</a:t>
+              <a:t>reunião, leitura dos documentos e definição da estratégia</a:t>
             </a:r>
             <a:endParaRPr lang="en-US" sz="1050" dirty="0"/>
           </a:p>
@@ -3057,6 +2770,191 @@
         <p:spPr>
           <a:xfrm>
             <a:off x="2560320" y="1600200"/>
+            <a:ext cx="1920240" cy="2514600"/>
+          </a:xfrm>
+          <a:prstGeom prst="roundRect">
+            <a:avLst>
+              <a:gd name="adj" fmla="val 5714"/>
+            </a:avLst>
+          </a:prstGeom>
+          <a:solidFill>
+            <a:srgbClr val="F3EEFB"/>
+          </a:solidFill>
+          <a:ln w="12700">
+            <a:solidFill>
+              <a:srgbClr val="F3EEFB"/>
+            </a:solidFill>
+            <a:prstDash val="solid"/>
+          </a:ln>
+        </p:spPr>
+      </p:sp>
+      <p:sp>
+        <p:nvSpPr>
+          <p:cNvPr id="10" name="Text 8"/>
+          <p:cNvSpPr txBox="1"/>
+          <p:nvPr/>
+        </p:nvSpPr>
+        <p:spPr>
+          <a:xfrm>
+            <a:off x="2743200" y="1737360"/>
+            <a:ext cx="548640" cy="457200"/>
+          </a:xfrm>
+          <a:prstGeom prst="rect">
+            <a:avLst/>
+          </a:prstGeom>
+          <a:noFill/>
+          <a:ln/>
+        </p:spPr>
+        <p:txBody>
+          <a:bodyPr wrap="square" lIns="0" tIns="0" rIns="0" bIns="0" rtlCol="0" anchor="ctr"/>
+          <a:lstStyle/>
+          <a:p>
+            <a:pPr indent="0" marL="0">
+              <a:buNone/>
+            </a:pPr>
+            <a:r>
+              <a:rPr lang="en-US" sz="2200" b="1" dirty="0">
+                <a:solidFill>
+                  <a:srgbClr val="7A5AA8"/>
+                </a:solidFill>
+                <a:latin typeface="Arial" pitchFamily="34" charset="0"/>
+                <a:ea typeface="Arial" pitchFamily="34" charset="-122"/>
+                <a:cs typeface="Arial" pitchFamily="34" charset="-120"/>
+              </a:rPr>
+              <a:t>2</a:t>
+            </a:r>
+            <a:endParaRPr lang="en-US" sz="2200" dirty="0"/>
+          </a:p>
+        </p:txBody>
+      </p:sp>
+      <p:sp>
+        <p:nvSpPr>
+          <p:cNvPr id="11" name="Text 9"/>
+          <p:cNvSpPr txBox="1"/>
+          <p:nvPr/>
+        </p:nvSpPr>
+        <p:spPr>
+          <a:xfrm>
+            <a:off x="2743200" y="2240280"/>
+            <a:ext cx="1645920" cy="548640"/>
+          </a:xfrm>
+          <a:prstGeom prst="rect">
+            <a:avLst/>
+          </a:prstGeom>
+          <a:noFill/>
+          <a:ln/>
+        </p:spPr>
+        <p:txBody>
+          <a:bodyPr wrap="square" lIns="0" tIns="0" rIns="0" bIns="0" rtlCol="0" anchor="t">
+            <a:normAutofit/>
+          </a:bodyPr>
+          <a:lstStyle/>
+          <a:p>
+            <a:pPr indent="0" marL="0">
+              <a:buNone/>
+            </a:pPr>
+            <a:r>
+              <a:rPr lang="en-US" sz="1300" b="1" dirty="0">
+                <a:solidFill>
+                  <a:srgbClr val="3B1F5E"/>
+                </a:solidFill>
+                <a:latin typeface="Arial" pitchFamily="34" charset="0"/>
+                <a:ea typeface="Arial" pitchFamily="34" charset="-122"/>
+                <a:cs typeface="Arial" pitchFamily="34" charset="-120"/>
+              </a:rPr>
+              <a:t>Fase inicial</a:t>
+            </a:r>
+            <a:endParaRPr lang="en-US" sz="1300" dirty="0"/>
+          </a:p>
+        </p:txBody>
+      </p:sp>
+      <p:sp>
+        <p:nvSpPr>
+          <p:cNvPr id="12" name="Text 10"/>
+          <p:cNvSpPr txBox="1"/>
+          <p:nvPr/>
+        </p:nvSpPr>
+        <p:spPr>
+          <a:xfrm>
+            <a:off x="2743200" y="2788920"/>
+            <a:ext cx="1645920" cy="320040"/>
+          </a:xfrm>
+          <a:prstGeom prst="rect">
+            <a:avLst/>
+          </a:prstGeom>
+          <a:noFill/>
+          <a:ln/>
+        </p:spPr>
+        <p:txBody>
+          <a:bodyPr wrap="square" lIns="0" tIns="0" rIns="0" bIns="0" rtlCol="0" anchor="t"/>
+          <a:lstStyle/>
+          <a:p>
+            <a:pPr indent="0" marL="0">
+              <a:buNone/>
+            </a:pPr>
+            <a:r>
+              <a:rPr lang="en-US" sz="950" dirty="0">
+                <a:solidFill>
+                  <a:srgbClr val="5A4A78"/>
+                </a:solidFill>
+                <a:latin typeface="Arial" pitchFamily="34" charset="0"/>
+                <a:ea typeface="Arial" pitchFamily="34" charset="-122"/>
+                <a:cs typeface="Arial" pitchFamily="34" charset="-120"/>
+              </a:rPr>
+              <a:t>até 60 dias</a:t>
+            </a:r>
+            <a:endParaRPr lang="en-US" sz="950" dirty="0"/>
+          </a:p>
+        </p:txBody>
+      </p:sp>
+      <p:sp>
+        <p:nvSpPr>
+          <p:cNvPr id="13" name="Text 11"/>
+          <p:cNvSpPr txBox="1"/>
+          <p:nvPr/>
+        </p:nvSpPr>
+        <p:spPr>
+          <a:xfrm>
+            <a:off x="2743200" y="3108960"/>
+            <a:ext cx="1645920" cy="960120"/>
+          </a:xfrm>
+          <a:prstGeom prst="rect">
+            <a:avLst/>
+          </a:prstGeom>
+          <a:noFill/>
+          <a:ln/>
+        </p:spPr>
+        <p:txBody>
+          <a:bodyPr wrap="square" lIns="0" tIns="0" rIns="0" bIns="0" rtlCol="0" anchor="t"/>
+          <a:lstStyle/>
+          <a:p>
+            <a:pPr indent="0" marL="0">
+              <a:buNone/>
+            </a:pPr>
+            <a:r>
+              <a:rPr lang="en-US" sz="1050" dirty="0">
+                <a:solidFill>
+                  <a:srgbClr val="1F1235"/>
+                </a:solidFill>
+                <a:latin typeface="Arial" pitchFamily="34" charset="0"/>
+                <a:ea typeface="Arial" pitchFamily="34" charset="-122"/>
+                <a:cs typeface="Arial" pitchFamily="34" charset="-120"/>
+              </a:rPr>
+              <a:t>redação e protocolo do pedido, acompanhamento das primeiras respostas</a:t>
+            </a:r>
+            <a:endParaRPr lang="en-US" sz="1050" dirty="0"/>
+          </a:p>
+        </p:txBody>
+      </p:sp>
+      <p:sp>
+        <p:nvSpPr>
+          <p:cNvPr id="14" name="Shape 12"/>
+          <p:cNvSpPr/>
+          <p:nvPr/>
+        </p:nvSpPr>
+        <p:spPr>
+          <a:xfrm>
+            <a:off x="4663440" y="1600200"/>
             <a:ext cx="1920240" cy="2514600"/>
           </a:xfrm>
           <a:prstGeom prst="roundRect">
@@ -3077,13 +2975,13 @@
       </p:sp>
       <p:sp>
         <p:nvSpPr>
-          <p:cNvPr id="10" name="Text 8"/>
+          <p:cNvPr id="15" name="Text 13"/>
           <p:cNvSpPr txBox="1"/>
           <p:nvPr/>
         </p:nvSpPr>
         <p:spPr>
           <a:xfrm>
-            <a:off x="2743200" y="1737360"/>
+            <a:off x="4846320" y="1737360"/>
             <a:ext cx="548640" cy="457200"/>
           </a:xfrm>
           <a:prstGeom prst="rect">
@@ -3108,7 +3006,7 @@
                 <a:ea typeface="Arial" pitchFamily="34" charset="-122"/>
                 <a:cs typeface="Arial" pitchFamily="34" charset="-120"/>
               </a:rPr>
-              <a:t>2</a:t>
+              <a:t>3</a:t>
             </a:r>
             <a:endParaRPr lang="en-US" sz="2200" dirty="0"/>
           </a:p>
@@ -3116,14 +3014,14 @@
       </p:sp>
       <p:sp>
         <p:nvSpPr>
-          <p:cNvPr id="11" name="Text 9"/>
+          <p:cNvPr id="16" name="Text 14"/>
           <p:cNvSpPr txBox="1"/>
           <p:nvPr/>
         </p:nvSpPr>
         <p:spPr>
           <a:xfrm>
-            <a:off x="2743200" y="2240280"/>
-            <a:ext cx="1645920" cy="365760"/>
+            <a:off x="4846320" y="2240280"/>
+            <a:ext cx="1645920" cy="548640"/>
           </a:xfrm>
           <a:prstGeom prst="rect">
             <a:avLst/>
@@ -3132,7 +3030,7 @@
           <a:ln/>
         </p:spPr>
         <p:txBody>
-          <a:bodyPr wrap="square" lIns="0" tIns="0" rIns="0" bIns="0" rtlCol="0" anchor="ctr">
+          <a:bodyPr wrap="square" lIns="0" tIns="0" rIns="0" bIns="0" rtlCol="0" anchor="t">
             <a:normAutofit/>
           </a:bodyPr>
           <a:lstStyle/>
@@ -3141,7 +3039,7 @@
               <a:buNone/>
             </a:pPr>
             <a:r>
-              <a:rPr lang="en-US" sz="1400" b="1" dirty="0">
+              <a:rPr lang="en-US" sz="1300" b="1" dirty="0">
                 <a:solidFill>
                   <a:srgbClr val="3B1F5E"/>
                 </a:solidFill>
@@ -3149,22 +3047,22 @@
                 <a:ea typeface="Arial" pitchFamily="34" charset="-122"/>
                 <a:cs typeface="Arial" pitchFamily="34" charset="-120"/>
               </a:rPr>
-              <a:t>Negociar</a:t>
-            </a:r>
-            <a:endParaRPr lang="en-US" sz="1400" dirty="0"/>
-          </a:p>
-        </p:txBody>
-      </p:sp>
-      <p:sp>
-        <p:nvSpPr>
-          <p:cNvPr id="12" name="Text 10"/>
+              <a:t>Acompanhamento até a decisão</a:t>
+            </a:r>
+            <a:endParaRPr lang="en-US" sz="1300" dirty="0"/>
+          </a:p>
+        </p:txBody>
+      </p:sp>
+      <p:sp>
+        <p:nvSpPr>
+          <p:cNvPr id="17" name="Text 15"/>
           <p:cNvSpPr txBox="1"/>
           <p:nvPr/>
         </p:nvSpPr>
         <p:spPr>
           <a:xfrm>
-            <a:off x="2743200" y="2606040"/>
-            <a:ext cx="1645920" cy="411480"/>
+            <a:off x="4846320" y="2788920"/>
+            <a:ext cx="1645920" cy="320040"/>
           </a:xfrm>
           <a:prstGeom prst="rect">
             <a:avLst/>
@@ -3188,7 +3086,7 @@
                 <a:ea typeface="Arial" pitchFamily="34" charset="-122"/>
                 <a:cs typeface="Arial" pitchFamily="34" charset="-120"/>
               </a:rPr>
-              <a:t>semanas 3 a 8</a:t>
+              <a:t>durante o caso</a:t>
             </a:r>
             <a:endParaRPr lang="en-US" sz="950" dirty="0"/>
           </a:p>
@@ -3196,14 +3094,14 @@
       </p:sp>
       <p:sp>
         <p:nvSpPr>
-          <p:cNvPr id="13" name="Text 11"/>
+          <p:cNvPr id="18" name="Text 16"/>
           <p:cNvSpPr txBox="1"/>
           <p:nvPr/>
         </p:nvSpPr>
         <p:spPr>
           <a:xfrm>
-            <a:off x="2743200" y="3017520"/>
-            <a:ext cx="1645920" cy="1005840"/>
+            <a:off x="4846320" y="3108960"/>
+            <a:ext cx="1645920" cy="960120"/>
           </a:xfrm>
           <a:prstGeom prst="rect">
             <a:avLst/>
@@ -3227,7 +3125,7 @@
                 <a:ea typeface="Arial" pitchFamily="34" charset="-122"/>
                 <a:cs typeface="Arial" pitchFamily="34" charset="-120"/>
               </a:rPr>
-              <a:t>contato com o fornecedor, propostas de acordo e reuniões</a:t>
+              <a:t>manifestações, audiências e reuniões com você</a:t>
             </a:r>
             <a:endParaRPr lang="en-US" sz="1050" dirty="0"/>
           </a:p>
@@ -3235,13 +3133,13 @@
       </p:sp>
       <p:sp>
         <p:nvSpPr>
-          <p:cNvPr id="14" name="Shape 12"/>
+          <p:cNvPr id="19" name="Shape 17"/>
           <p:cNvSpPr/>
           <p:nvPr/>
         </p:nvSpPr>
         <p:spPr>
           <a:xfrm>
-            <a:off x="4663440" y="1600200"/>
+            <a:off x="6766560" y="1600200"/>
             <a:ext cx="1920240" cy="2514600"/>
           </a:xfrm>
           <a:prstGeom prst="roundRect">
@@ -3262,13 +3160,13 @@
       </p:sp>
       <p:sp>
         <p:nvSpPr>
-          <p:cNvPr id="15" name="Text 13"/>
+          <p:cNvPr id="20" name="Text 18"/>
           <p:cNvSpPr txBox="1"/>
           <p:nvPr/>
         </p:nvSpPr>
         <p:spPr>
           <a:xfrm>
-            <a:off x="4846320" y="1737360"/>
+            <a:off x="6949440" y="1737360"/>
             <a:ext cx="548640" cy="457200"/>
           </a:xfrm>
           <a:prstGeom prst="rect">
@@ -3293,7 +3191,7 @@
                 <a:ea typeface="Arial" pitchFamily="34" charset="-122"/>
                 <a:cs typeface="Arial" pitchFamily="34" charset="-120"/>
               </a:rPr>
-              <a:t>3</a:t>
+              <a:t>4</a:t>
             </a:r>
             <a:endParaRPr lang="en-US" sz="2200" dirty="0"/>
           </a:p>
@@ -3301,14 +3199,14 @@
       </p:sp>
       <p:sp>
         <p:nvSpPr>
-          <p:cNvPr id="16" name="Text 14"/>
+          <p:cNvPr id="21" name="Text 19"/>
           <p:cNvSpPr txBox="1"/>
           <p:nvPr/>
         </p:nvSpPr>
         <p:spPr>
           <a:xfrm>
-            <a:off x="4846320" y="2240280"/>
-            <a:ext cx="1645920" cy="365760"/>
+            <a:off x="6949440" y="2240280"/>
+            <a:ext cx="1645920" cy="548640"/>
           </a:xfrm>
           <a:prstGeom prst="rect">
             <a:avLst/>
@@ -3317,7 +3215,7 @@
           <a:ln/>
         </p:spPr>
         <p:txBody>
-          <a:bodyPr wrap="square" lIns="0" tIns="0" rIns="0" bIns="0" rtlCol="0" anchor="ctr">
+          <a:bodyPr wrap="square" lIns="0" tIns="0" rIns="0" bIns="0" rtlCol="0" anchor="t">
             <a:normAutofit/>
           </a:bodyPr>
           <a:lstStyle/>
@@ -3326,7 +3224,7 @@
               <a:buNone/>
             </a:pPr>
             <a:r>
-              <a:rPr lang="en-US" sz="1400" b="1" dirty="0">
+              <a:rPr lang="en-US" sz="1300" b="1" dirty="0">
                 <a:solidFill>
                   <a:srgbClr val="3B1F5E"/>
                 </a:solidFill>
@@ -3334,22 +3232,22 @@
                 <a:ea typeface="Arial" pitchFamily="34" charset="-122"/>
                 <a:cs typeface="Arial" pitchFamily="34" charset="-120"/>
               </a:rPr>
-              <a:t>Demanda</a:t>
-            </a:r>
-            <a:endParaRPr lang="en-US" sz="1400" dirty="0"/>
-          </a:p>
-        </p:txBody>
-      </p:sp>
-      <p:sp>
-        <p:nvSpPr>
-          <p:cNvPr id="17" name="Text 15"/>
+              <a:t>Encerramento</a:t>
+            </a:r>
+            <a:endParaRPr lang="en-US" sz="1300" dirty="0"/>
+          </a:p>
+        </p:txBody>
+      </p:sp>
+      <p:sp>
+        <p:nvSpPr>
+          <p:cNvPr id="22" name="Text 20"/>
           <p:cNvSpPr txBox="1"/>
           <p:nvPr/>
         </p:nvSpPr>
         <p:spPr>
           <a:xfrm>
-            <a:off x="4846320" y="2606040"/>
-            <a:ext cx="1645920" cy="411480"/>
+            <a:off x="6949440" y="2788920"/>
+            <a:ext cx="1645920" cy="320040"/>
           </a:xfrm>
           <a:prstGeom prst="rect">
             <a:avLst/>
@@ -3373,7 +3271,7 @@
                 <a:ea typeface="Arial" pitchFamily="34" charset="-122"/>
                 <a:cs typeface="Arial" pitchFamily="34" charset="-120"/>
               </a:rPr>
-              <a:t>a partir do 3º mês, se não houver acordo</a:t>
+              <a:t>ao fim do caso</a:t>
             </a:r>
             <a:endParaRPr lang="en-US" sz="950" dirty="0"/>
           </a:p>
@@ -3381,14 +3279,14 @@
       </p:sp>
       <p:sp>
         <p:nvSpPr>
-          <p:cNvPr id="18" name="Text 16"/>
+          <p:cNvPr id="23" name="Text 21"/>
           <p:cNvSpPr txBox="1"/>
           <p:nvPr/>
         </p:nvSpPr>
         <p:spPr>
           <a:xfrm>
-            <a:off x="4846320" y="3017520"/>
-            <a:ext cx="1645920" cy="1005840"/>
+            <a:off x="6949440" y="3108960"/>
+            <a:ext cx="1645920" cy="960120"/>
           </a:xfrm>
           <a:prstGeom prst="rect">
             <a:avLst/>
@@ -3412,7 +3310,7 @@
                 <a:ea typeface="Arial" pitchFamily="34" charset="-122"/>
                 <a:cs typeface="Arial" pitchFamily="34" charset="-120"/>
               </a:rPr>
-              <a:t>preparação, protocolo e acompanhamento de cada etapa</a:t>
+              <a:t>prestação de contas e organização dos documentos finais</a:t>
             </a:r>
             <a:endParaRPr lang="en-US" sz="1050" dirty="0"/>
           </a:p>
@@ -3420,41 +3318,14 @@
       </p:sp>
       <p:sp>
         <p:nvSpPr>
-          <p:cNvPr id="19" name="Shape 17"/>
-          <p:cNvSpPr/>
-          <p:nvPr/>
-        </p:nvSpPr>
-        <p:spPr>
-          <a:xfrm>
-            <a:off x="6766560" y="1600200"/>
-            <a:ext cx="1920240" cy="2514600"/>
-          </a:xfrm>
-          <a:prstGeom prst="roundRect">
-            <a:avLst>
-              <a:gd name="adj" fmla="val 5714"/>
-            </a:avLst>
-          </a:prstGeom>
-          <a:solidFill>
-            <a:srgbClr val="F3EEFB"/>
-          </a:solidFill>
-          <a:ln w="12700">
-            <a:solidFill>
-              <a:srgbClr val="F3EEFB"/>
-            </a:solidFill>
-            <a:prstDash val="solid"/>
-          </a:ln>
-        </p:spPr>
-      </p:sp>
-      <p:sp>
-        <p:nvSpPr>
-          <p:cNvPr id="20" name="Text 18"/>
+          <p:cNvPr id="24" name="Text 22"/>
           <p:cNvSpPr txBox="1"/>
           <p:nvPr/>
         </p:nvSpPr>
         <p:spPr>
           <a:xfrm>
-            <a:off x="6949440" y="1737360"/>
-            <a:ext cx="548640" cy="457200"/>
+            <a:off x="457200" y="4206240"/>
+            <a:ext cx="8229600" cy="365760"/>
           </a:xfrm>
           <a:prstGeom prst="rect">
             <a:avLst/>
@@ -3470,87 +3341,7 @@
               <a:buNone/>
             </a:pPr>
             <a:r>
-              <a:rPr lang="en-US" sz="2200" b="1" dirty="0">
-                <a:solidFill>
-                  <a:srgbClr val="7A5AA8"/>
-                </a:solidFill>
-                <a:latin typeface="Arial" pitchFamily="34" charset="0"/>
-                <a:ea typeface="Arial" pitchFamily="34" charset="-122"/>
-                <a:cs typeface="Arial" pitchFamily="34" charset="-120"/>
-              </a:rPr>
-              <a:t>4</a:t>
-            </a:r>
-            <a:endParaRPr lang="en-US" sz="2200" dirty="0"/>
-          </a:p>
-        </p:txBody>
-      </p:sp>
-      <p:sp>
-        <p:nvSpPr>
-          <p:cNvPr id="21" name="Text 19"/>
-          <p:cNvSpPr txBox="1"/>
-          <p:nvPr/>
-        </p:nvSpPr>
-        <p:spPr>
-          <a:xfrm>
-            <a:off x="6949440" y="2240280"/>
-            <a:ext cx="1645920" cy="365760"/>
-          </a:xfrm>
-          <a:prstGeom prst="rect">
-            <a:avLst/>
-          </a:prstGeom>
-          <a:noFill/>
-          <a:ln/>
-        </p:spPr>
-        <p:txBody>
-          <a:bodyPr wrap="square" lIns="0" tIns="0" rIns="0" bIns="0" rtlCol="0" anchor="ctr">
-            <a:normAutofit/>
-          </a:bodyPr>
-          <a:lstStyle/>
-          <a:p>
-            <a:pPr indent="0" marL="0">
-              <a:buNone/>
-            </a:pPr>
-            <a:r>
-              <a:rPr lang="en-US" sz="1400" b="1" dirty="0">
-                <a:solidFill>
-                  <a:srgbClr val="3B1F5E"/>
-                </a:solidFill>
-                <a:latin typeface="Arial" pitchFamily="34" charset="0"/>
-                <a:ea typeface="Arial" pitchFamily="34" charset="-122"/>
-                <a:cs typeface="Arial" pitchFamily="34" charset="-120"/>
-              </a:rPr>
-              <a:t>Acompanhar</a:t>
-            </a:r>
-            <a:endParaRPr lang="en-US" sz="1400" dirty="0"/>
-          </a:p>
-        </p:txBody>
-      </p:sp>
-      <p:sp>
-        <p:nvSpPr>
-          <p:cNvPr id="22" name="Text 20"/>
-          <p:cNvSpPr txBox="1"/>
-          <p:nvPr/>
-        </p:nvSpPr>
-        <p:spPr>
-          <a:xfrm>
-            <a:off x="6949440" y="2606040"/>
-            <a:ext cx="1645920" cy="411480"/>
-          </a:xfrm>
-          <a:prstGeom prst="rect">
-            <a:avLst/>
-          </a:prstGeom>
-          <a:noFill/>
-          <a:ln/>
-        </p:spPr>
-        <p:txBody>
-          <a:bodyPr wrap="square" lIns="0" tIns="0" rIns="0" bIns="0" rtlCol="0" anchor="t"/>
-          <a:lstStyle/>
-          <a:p>
-            <a:pPr indent="0" marL="0">
-              <a:buNone/>
-            </a:pPr>
-            <a:r>
-              <a:rPr lang="en-US" sz="950" dirty="0">
+              <a:rPr lang="en-US" sz="1050" dirty="0">
                 <a:solidFill>
                   <a:srgbClr val="5A4A78"/>
                 </a:solidFill>
@@ -3558,234 +3349,11 @@
                 <a:ea typeface="Arial" pitchFamily="34" charset="-122"/>
                 <a:cs typeface="Arial" pitchFamily="34" charset="-120"/>
               </a:rPr>
-              <a:t>12 a 18 meses (estimativa)</a:t>
-            </a:r>
-            <a:endParaRPr lang="en-US" sz="950" dirty="0"/>
-          </a:p>
-        </p:txBody>
-      </p:sp>
-      <p:sp>
-        <p:nvSpPr>
-          <p:cNvPr id="23" name="Text 21"/>
-          <p:cNvSpPr txBox="1"/>
-          <p:nvPr/>
-        </p:nvSpPr>
-        <p:spPr>
-          <a:xfrm>
-            <a:off x="6949440" y="3017520"/>
-            <a:ext cx="1645920" cy="1005840"/>
-          </a:xfrm>
-          <a:prstGeom prst="rect">
-            <a:avLst/>
-          </a:prstGeom>
-          <a:noFill/>
-          <a:ln/>
-        </p:spPr>
-        <p:txBody>
-          <a:bodyPr wrap="square" lIns="0" tIns="0" rIns="0" bIns="0" rtlCol="0" anchor="t"/>
-          <a:lstStyle/>
-          <a:p>
-            <a:pPr indent="0" marL="0">
-              <a:buNone/>
-            </a:pPr>
-            <a:r>
-              <a:rPr lang="en-US" sz="1050" dirty="0">
-                <a:solidFill>
-                  <a:srgbClr val="1F1235"/>
-                </a:solidFill>
-                <a:latin typeface="Arial" pitchFamily="34" charset="0"/>
-                <a:ea typeface="Arial" pitchFamily="34" charset="-122"/>
-                <a:cs typeface="Arial" pitchFamily="34" charset="-120"/>
-              </a:rPr>
-              <a:t>audiências, reuniões e relatório mensal até o encerramento</a:t>
+              <a:t>A etapa destacada é a mais longa. Se houver acordo antes, o trabalho termina ali e a prestação de contas é feita na etapa 4.</a:t>
             </a:r>
             <a:endParaRPr lang="en-US" sz="1050" dirty="0"/>
           </a:p>
         </p:txBody>
-      </p:sp>
-      <p:sp>
-        <p:nvSpPr>
-          <p:cNvPr id="24" name="Text 22"/>
-          <p:cNvSpPr txBox="1"/>
-          <p:nvPr/>
-        </p:nvSpPr>
-        <p:spPr>
-          <a:xfrm>
-            <a:off x="457200" y="4206240"/>
-            <a:ext cx="8229600" cy="365760"/>
-          </a:xfrm>
-          <a:prstGeom prst="rect">
-            <a:avLst/>
-          </a:prstGeom>
-          <a:noFill/>
-          <a:ln/>
-        </p:spPr>
-        <p:txBody>
-          <a:bodyPr wrap="square" lIns="0" tIns="0" rIns="0" bIns="0" rtlCol="0" anchor="ctr"/>
-          <a:lstStyle/>
-          <a:p>
-            <a:pPr indent="0" marL="0">
-              <a:buNone/>
-            </a:pPr>
-            <a:r>
-              <a:rPr lang="en-US" sz="1050" dirty="0">
-                <a:solidFill>
-                  <a:srgbClr val="5A4A78"/>
-                </a:solidFill>
-                <a:latin typeface="Arial" pitchFamily="34" charset="0"/>
-                <a:ea typeface="Arial" pitchFamily="34" charset="-122"/>
-                <a:cs typeface="Arial" pitchFamily="34" charset="-120"/>
-              </a:rPr>
-              <a:t>A etapa destacada é onde a maior parte dos casos como este se resolve. Se houver acordo, o trabalho termina na etapa 2.</a:t>
-            </a:r>
-            <a:endParaRPr lang="en-US" sz="1050" dirty="0"/>
-          </a:p>
-        </p:txBody>
-      </p:sp>
-      <p:sp>
-        <p:nvSpPr>
-          <p:cNvPr id="25" name="Text 23"/>
-          <p:cNvSpPr txBox="1"/>
-          <p:nvPr/>
-        </p:nvSpPr>
-        <p:spPr>
-          <a:xfrm>
-            <a:off x="457200" y="4791456"/>
-            <a:ext cx="6858000" cy="201168"/>
-          </a:xfrm>
-          <a:prstGeom prst="rect">
-            <a:avLst/>
-          </a:prstGeom>
-          <a:noFill/>
-          <a:ln/>
-        </p:spPr>
-        <p:txBody>
-          <a:bodyPr wrap="square" lIns="0" tIns="0" rIns="0" bIns="0" rtlCol="0" anchor="ctr"/>
-          <a:lstStyle/>
-          <a:p>
-            <a:pPr indent="0" marL="0">
-              <a:buNone/>
-            </a:pPr>
-            <a:r>
-              <a:rPr lang="en-US" sz="700" dirty="0">
-                <a:solidFill>
-                  <a:srgbClr val="B89BE0"/>
-                </a:solidFill>
-                <a:latin typeface="Arial" pitchFamily="34" charset="0"/>
-                <a:ea typeface="Arial" pitchFamily="34" charset="-122"/>
-                <a:cs typeface="Arial" pitchFamily="34" charset="-120"/>
-              </a:rPr>
-              <a:t>Kit de Gestão para Advogados · modelo v1.0 · set/2026</a:t>
-            </a:r>
-            <a:endParaRPr lang="en-US" sz="700" dirty="0"/>
-          </a:p>
-        </p:txBody>
-      </p:sp>
-      <p:sp>
-        <p:nvSpPr>
-          <p:cNvPr id="26" name="Shape 24"/>
-          <p:cNvSpPr/>
-          <p:nvPr/>
-        </p:nvSpPr>
-        <p:spPr>
-          <a:xfrm>
-            <a:off x="8229600" y="4818888"/>
-            <a:ext cx="211226" cy="70409"/>
-          </a:xfrm>
-          <a:prstGeom prst="roundRect">
-            <a:avLst>
-              <a:gd name="adj" fmla="val 42857"/>
-            </a:avLst>
-          </a:prstGeom>
-          <a:solidFill>
-            <a:srgbClr val="7A5AA8"/>
-          </a:solidFill>
-          <a:ln w="12700">
-            <a:solidFill>
-              <a:srgbClr val="7A5AA8"/>
-            </a:solidFill>
-            <a:prstDash val="solid"/>
-          </a:ln>
-        </p:spPr>
-      </p:sp>
-      <p:sp>
-        <p:nvSpPr>
-          <p:cNvPr id="27" name="Shape 25"/>
-          <p:cNvSpPr/>
-          <p:nvPr/>
-        </p:nvSpPr>
-        <p:spPr>
-          <a:xfrm>
-            <a:off x="8279892" y="4728362"/>
-            <a:ext cx="211226" cy="70409"/>
-          </a:xfrm>
-          <a:prstGeom prst="roundRect">
-            <a:avLst>
-              <a:gd name="adj" fmla="val 42857"/>
-            </a:avLst>
-          </a:prstGeom>
-          <a:solidFill>
-            <a:srgbClr val="3B1F5E"/>
-          </a:solidFill>
-          <a:ln w="12700">
-            <a:solidFill>
-              <a:srgbClr val="3B1F5E"/>
-            </a:solidFill>
-            <a:prstDash val="solid"/>
-          </a:ln>
-        </p:spPr>
-      </p:sp>
-      <p:sp>
-        <p:nvSpPr>
-          <p:cNvPr id="28" name="Shape 26"/>
-          <p:cNvSpPr/>
-          <p:nvPr/>
-        </p:nvSpPr>
-        <p:spPr>
-          <a:xfrm>
-            <a:off x="8330184" y="4637837"/>
-            <a:ext cx="211226" cy="70409"/>
-          </a:xfrm>
-          <a:prstGeom prst="roundRect">
-            <a:avLst>
-              <a:gd name="adj" fmla="val 42857"/>
-            </a:avLst>
-          </a:prstGeom>
-          <a:solidFill>
-            <a:srgbClr val="3B1F5E"/>
-          </a:solidFill>
-          <a:ln w="12700">
-            <a:solidFill>
-              <a:srgbClr val="3B1F5E"/>
-            </a:solidFill>
-            <a:prstDash val="solid"/>
-          </a:ln>
-        </p:spPr>
-      </p:sp>
-      <p:sp>
-        <p:nvSpPr>
-          <p:cNvPr id="29" name="Shape 27"/>
-          <p:cNvSpPr/>
-          <p:nvPr/>
-        </p:nvSpPr>
-        <p:spPr>
-          <a:xfrm>
-            <a:off x="8541410" y="4839005"/>
-            <a:ext cx="65380" cy="65380"/>
-          </a:xfrm>
-          <a:prstGeom prst="ellipse">
-            <a:avLst/>
-          </a:prstGeom>
-          <a:solidFill>
-            <a:srgbClr val="FFC83D"/>
-          </a:solidFill>
-          <a:ln w="12700">
-            <a:solidFill>
-              <a:srgbClr val="FFC83D"/>
-            </a:solidFill>
-            <a:prstDash val="solid"/>
-          </a:ln>
-        </p:spPr>
       </p:sp>
     </p:spTree>
   </p:cSld>
@@ -3798,13 +3366,6 @@
 <file path=ppt/slides/slide4.xml><?xml version="1.0" encoding="utf-8"?>
 <p:sld xmlns:a="http://schemas.openxmlformats.org/drawingml/2006/main" xmlns:r="http://schemas.openxmlformats.org/officeDocument/2006/relationships" xmlns:p="http://schemas.openxmlformats.org/presentationml/2006/main">
   <p:cSld name="Slide 4">
-    <p:bg>
-      <p:bgPr>
-        <a:solidFill>
-          <a:srgbClr val="FFFFFF"/>
-        </a:solidFill>
-      </p:bgPr>
-    </p:bg>
     <p:spTree>
       <p:nvGrpSpPr>
         <p:cNvPr id="1" name=""/>
@@ -4037,7 +3598,7 @@
                 <a:ea typeface="Arial" pitchFamily="34" charset="-122"/>
                 <a:cs typeface="Arial" pitchFamily="34" charset="-120"/>
               </a:rPr>
-              <a:t>Conduz o caso, as reuniões com a empresa e a negociação com o fornecedor. Estimativa: 70 horas.</a:t>
+              <a:t>Conduz o caso, as reuniões com você e a conversa com a outra parte. Estimativa: 30 horas.</a:t>
             </a:r>
             <a:endParaRPr lang="en-US" sz="1050" dirty="0"/>
           </a:p>
@@ -4181,7 +3742,7 @@
                 <a:ea typeface="Arial" pitchFamily="34" charset="-122"/>
                 <a:cs typeface="Arial" pitchFamily="34" charset="-120"/>
               </a:rPr>
-              <a:t>Revisa o que sai do escritório e substitui a Marina em audiências e reuniões quando preciso. Estimativa: 15 horas.</a:t>
+              <a:t>Revisa o que sai do escritório e substitui a Marina em audiências e reuniões quando preciso. Estimativa: 8 horas.</a:t>
             </a:r>
             <a:endParaRPr lang="en-US" sz="1050" dirty="0"/>
           </a:p>
@@ -4325,7 +3886,7 @@
                 <a:ea typeface="Arial" pitchFamily="34" charset="-122"/>
                 <a:cs typeface="Arial" pitchFamily="34" charset="-120"/>
               </a:rPr>
-              <a:t>Organiza documentos, agenda e o relatório mensal, sob supervisão da Marina. Estimativa: 25 horas.</a:t>
+              <a:t>Organiza documentos, agenda e o relatório de andamento, sob supervisão da Marina. Estimativa: 15 horas.</a:t>
             </a:r>
             <a:endParaRPr lang="en-US" sz="1050" dirty="0"/>
           </a:p>
@@ -4364,156 +3925,11 @@
                 <a:ea typeface="Arial" pitchFamily="34" charset="-122"/>
                 <a:cs typeface="Arial" pitchFamily="34" charset="-120"/>
               </a:rPr>
-              <a:t>110 horas estimadas no total, base do valor da próxima página (planilha Simulador de honorário, 06).</a:t>
+              <a:t>53 horas estimadas no total, distribuídas nas quatro etapas da próxima página.</a:t>
             </a:r>
             <a:endParaRPr lang="en-US" sz="1050" dirty="0"/>
           </a:p>
         </p:txBody>
-      </p:sp>
-      <p:sp>
-        <p:nvSpPr>
-          <p:cNvPr id="17" name="Text 15"/>
-          <p:cNvSpPr txBox="1"/>
-          <p:nvPr/>
-        </p:nvSpPr>
-        <p:spPr>
-          <a:xfrm>
-            <a:off x="457200" y="4791456"/>
-            <a:ext cx="6858000" cy="201168"/>
-          </a:xfrm>
-          <a:prstGeom prst="rect">
-            <a:avLst/>
-          </a:prstGeom>
-          <a:noFill/>
-          <a:ln/>
-        </p:spPr>
-        <p:txBody>
-          <a:bodyPr wrap="square" lIns="0" tIns="0" rIns="0" bIns="0" rtlCol="0" anchor="ctr"/>
-          <a:lstStyle/>
-          <a:p>
-            <a:pPr indent="0" marL="0">
-              <a:buNone/>
-            </a:pPr>
-            <a:r>
-              <a:rPr lang="en-US" sz="700" dirty="0">
-                <a:solidFill>
-                  <a:srgbClr val="B89BE0"/>
-                </a:solidFill>
-                <a:latin typeface="Arial" pitchFamily="34" charset="0"/>
-                <a:ea typeface="Arial" pitchFamily="34" charset="-122"/>
-                <a:cs typeface="Arial" pitchFamily="34" charset="-120"/>
-              </a:rPr>
-              <a:t>Kit de Gestão para Advogados · modelo v1.0 · set/2026</a:t>
-            </a:r>
-            <a:endParaRPr lang="en-US" sz="700" dirty="0"/>
-          </a:p>
-        </p:txBody>
-      </p:sp>
-      <p:sp>
-        <p:nvSpPr>
-          <p:cNvPr id="18" name="Shape 16"/>
-          <p:cNvSpPr/>
-          <p:nvPr/>
-        </p:nvSpPr>
-        <p:spPr>
-          <a:xfrm>
-            <a:off x="8229600" y="4818888"/>
-            <a:ext cx="211226" cy="70409"/>
-          </a:xfrm>
-          <a:prstGeom prst="roundRect">
-            <a:avLst>
-              <a:gd name="adj" fmla="val 42857"/>
-            </a:avLst>
-          </a:prstGeom>
-          <a:solidFill>
-            <a:srgbClr val="7A5AA8"/>
-          </a:solidFill>
-          <a:ln w="12700">
-            <a:solidFill>
-              <a:srgbClr val="7A5AA8"/>
-            </a:solidFill>
-            <a:prstDash val="solid"/>
-          </a:ln>
-        </p:spPr>
-      </p:sp>
-      <p:sp>
-        <p:nvSpPr>
-          <p:cNvPr id="19" name="Shape 17"/>
-          <p:cNvSpPr/>
-          <p:nvPr/>
-        </p:nvSpPr>
-        <p:spPr>
-          <a:xfrm>
-            <a:off x="8279892" y="4728362"/>
-            <a:ext cx="211226" cy="70409"/>
-          </a:xfrm>
-          <a:prstGeom prst="roundRect">
-            <a:avLst>
-              <a:gd name="adj" fmla="val 42857"/>
-            </a:avLst>
-          </a:prstGeom>
-          <a:solidFill>
-            <a:srgbClr val="3B1F5E"/>
-          </a:solidFill>
-          <a:ln w="12700">
-            <a:solidFill>
-              <a:srgbClr val="3B1F5E"/>
-            </a:solidFill>
-            <a:prstDash val="solid"/>
-          </a:ln>
-        </p:spPr>
-      </p:sp>
-      <p:sp>
-        <p:nvSpPr>
-          <p:cNvPr id="20" name="Shape 18"/>
-          <p:cNvSpPr/>
-          <p:nvPr/>
-        </p:nvSpPr>
-        <p:spPr>
-          <a:xfrm>
-            <a:off x="8330184" y="4637837"/>
-            <a:ext cx="211226" cy="70409"/>
-          </a:xfrm>
-          <a:prstGeom prst="roundRect">
-            <a:avLst>
-              <a:gd name="adj" fmla="val 42857"/>
-            </a:avLst>
-          </a:prstGeom>
-          <a:solidFill>
-            <a:srgbClr val="3B1F5E"/>
-          </a:solidFill>
-          <a:ln w="12700">
-            <a:solidFill>
-              <a:srgbClr val="3B1F5E"/>
-            </a:solidFill>
-            <a:prstDash val="solid"/>
-          </a:ln>
-        </p:spPr>
-      </p:sp>
-      <p:sp>
-        <p:nvSpPr>
-          <p:cNvPr id="21" name="Shape 19"/>
-          <p:cNvSpPr/>
-          <p:nvPr/>
-        </p:nvSpPr>
-        <p:spPr>
-          <a:xfrm>
-            <a:off x="8541410" y="4839005"/>
-            <a:ext cx="65380" cy="65380"/>
-          </a:xfrm>
-          <a:prstGeom prst="ellipse">
-            <a:avLst/>
-          </a:prstGeom>
-          <a:solidFill>
-            <a:srgbClr val="FFC83D"/>
-          </a:solidFill>
-          <a:ln w="12700">
-            <a:solidFill>
-              <a:srgbClr val="FFC83D"/>
-            </a:solidFill>
-            <a:prstDash val="solid"/>
-          </a:ln>
-        </p:spPr>
       </p:sp>
     </p:spTree>
   </p:cSld>
@@ -4526,13 +3942,6 @@
 <file path=ppt/slides/slide5.xml><?xml version="1.0" encoding="utf-8"?>
 <p:sld xmlns:a="http://schemas.openxmlformats.org/drawingml/2006/main" xmlns:r="http://schemas.openxmlformats.org/officeDocument/2006/relationships" xmlns:p="http://schemas.openxmlformats.org/presentationml/2006/main">
   <p:cSld name="Slide 5">
-    <p:bg>
-      <p:bgPr>
-        <a:solidFill>
-          <a:srgbClr val="FFFFFF"/>
-        </a:solidFill>
-      </p:bgPr>
-    </p:bg>
     <p:spTree>
       <p:nvGrpSpPr>
         <p:cNvPr id="1" name=""/>
@@ -5084,7 +4493,7 @@
                           <a:ea typeface="Arial" pitchFamily="34" charset="-122"/>
                           <a:cs typeface="Arial" pitchFamily="34" charset="-120"/>
                         </a:rPr>
-                        <a:t>R$ 14.400</a:t>
+                        <a:t>R$ 7.000</a:t>
                       </a:r>
                       <a:endParaRPr lang="en-US" sz="1000" dirty="0">
                         <a:latin typeface="Arial" charset="0"/>
@@ -5220,7 +4629,7 @@
                           <a:ea typeface="Arial" pitchFamily="34" charset="-122"/>
                           <a:cs typeface="Arial" pitchFamily="34" charset="-120"/>
                         </a:rPr>
-                        <a:t>110 h</a:t>
+                        <a:t>53 h</a:t>
                       </a:r>
                       <a:endParaRPr lang="en-US" sz="1000" dirty="0">
                         <a:latin typeface="Arial" charset="0"/>
@@ -5288,7 +4697,7 @@
                           <a:ea typeface="Arial" pitchFamily="34" charset="-122"/>
                           <a:cs typeface="Arial" pitchFamily="34" charset="-120"/>
                         </a:rPr>
-                        <a:t>30% na assinatura + 4 parcelas mensais</a:t>
+                        <a:t>40 % na aceitação + 3 parcelas mensais</a:t>
                       </a:r>
                       <a:endParaRPr lang="en-US" sz="1000" dirty="0">
                         <a:latin typeface="Arial" charset="0"/>
@@ -5426,7 +4835,7 @@
                           <a:ea typeface="Arial" pitchFamily="34" charset="-122"/>
                           <a:cs typeface="Arial" pitchFamily="34" charset="-120"/>
                         </a:rPr>
-                        <a:t>R$ 9.600</a:t>
+                        <a:t>R$ 4.500</a:t>
                       </a:r>
                       <a:endParaRPr lang="en-US" sz="1000" dirty="0">
                         <a:latin typeface="Arial" charset="0"/>
@@ -5494,7 +4903,7 @@
                           <a:ea typeface="Arial" pitchFamily="34" charset="-122"/>
                           <a:cs typeface="Arial" pitchFamily="34" charset="-120"/>
                         </a:rPr>
-                        <a:t>10% do valor recuperado ou economizado, ao final</a:t>
+                        <a:t>15 % do valor recebido ou economizado, ao final</a:t>
                       </a:r>
                       <a:endParaRPr lang="en-US" sz="1000" dirty="0">
                         <a:latin typeface="Arial" charset="0"/>
@@ -5562,7 +4971,7 @@
                           <a:ea typeface="Arial" pitchFamily="34" charset="-122"/>
                           <a:cs typeface="Arial" pitchFamily="34" charset="-120"/>
                         </a:rPr>
-                        <a:t>110 h</a:t>
+                        <a:t>53 h</a:t>
                       </a:r>
                       <a:endParaRPr lang="en-US" sz="1000" dirty="0">
                         <a:latin typeface="Arial" charset="0"/>
@@ -5630,7 +5039,7 @@
                           <a:ea typeface="Arial" pitchFamily="34" charset="-122"/>
                           <a:cs typeface="Arial" pitchFamily="34" charset="-120"/>
                         </a:rPr>
-                        <a:t>30% na assinatura + 4 parcelas; êxito ao final</a:t>
+                        <a:t>40 % na aceitação + 3 parcelas; êxito ao final</a:t>
                       </a:r>
                       <a:endParaRPr lang="en-US" sz="1000" dirty="0">
                         <a:latin typeface="Arial" charset="0"/>
@@ -5695,7 +5104,7 @@
         <p:spPr>
           <a:xfrm>
             <a:off x="457200" y="2971800"/>
-            <a:ext cx="8229600" cy="1600200"/>
+            <a:ext cx="8229600" cy="1645920"/>
           </a:xfrm>
           <a:prstGeom prst="rect">
             <a:avLst/>
@@ -5714,7 +5123,7 @@
               <a:buNone/>
             </a:pPr>
             <a:r>
-              <a:rPr lang="en-US" sz="1100" b="1" dirty="0">
+              <a:rPr lang="en-US" sz="1050" b="1" dirty="0">
                 <a:solidFill>
                   <a:srgbClr val="3B1F5E"/>
                 </a:solidFill>
@@ -5724,7 +5133,7 @@
               </a:rPr>
               <a:t>Como chegamos ao valor</a:t>
             </a:r>
-            <a:endParaRPr lang="en-US" sz="1100" dirty="0"/>
+            <a:endParaRPr lang="en-US" sz="1050" dirty="0"/>
           </a:p>
           <a:p>
             <a:pPr marL="342900" indent="-342900">
@@ -5735,7 +5144,7 @@
               <a:buChar char="•"/>
             </a:pPr>
             <a:r>
-              <a:rPr lang="en-US" sz="1100" dirty="0">
+              <a:rPr lang="en-US" sz="1050" dirty="0">
                 <a:solidFill>
                   <a:srgbClr val="1F1235"/>
                 </a:solidFill>
@@ -5743,9 +5152,9 @@
                 <a:ea typeface="Arial" pitchFamily="34" charset="-122"/>
                 <a:cs typeface="Arial" pitchFamily="34" charset="-120"/>
               </a:rPr>
-              <a:t>Custo-hora do escritório × 110 horas estimadas + margem, conferido com a tabela interna de casos do mesmo tipo (planilha 08).</a:t>
-            </a:r>
-            <a:endParaRPr lang="en-US" sz="1100" dirty="0"/>
+              <a:t>Pelas horas estimadas em cada etapa e pelo valor de cada uma: análise inicial 8 h (R$ 900), fase inicial 18 h (R$ 1.800), acompanhamento até a decisão 22 h (R$ 1.200), encerramento 5 h (R$ 600). O êxito da opção B só existe se houver resultado para você.</a:t>
+            </a:r>
+            <a:endParaRPr lang="en-US" sz="1050" dirty="0"/>
           </a:p>
           <a:p>
             <a:pPr indent="0" marL="0">
@@ -5755,7 +5164,7 @@
               <a:buNone/>
             </a:pPr>
             <a:r>
-              <a:rPr lang="en-US" sz="1100" b="1" dirty="0">
+              <a:rPr lang="en-US" sz="1050" b="1" dirty="0">
                 <a:solidFill>
                   <a:srgbClr val="3B1F5E"/>
                 </a:solidFill>
@@ -5765,7 +5174,7 @@
               </a:rPr>
               <a:t>Por que recomendamos a opção mista</a:t>
             </a:r>
-            <a:endParaRPr lang="en-US" sz="1100" dirty="0"/>
+            <a:endParaRPr lang="en-US" sz="1050" dirty="0"/>
           </a:p>
           <a:p>
             <a:pPr marL="342900" indent="-342900">
@@ -5776,7 +5185,7 @@
               <a:buChar char="•"/>
             </a:pPr>
             <a:r>
-              <a:rPr lang="en-US" sz="1100" dirty="0">
+              <a:rPr lang="en-US" sz="1050" dirty="0">
                 <a:solidFill>
                   <a:srgbClr val="1F1235"/>
                 </a:solidFill>
@@ -5784,9 +5193,9 @@
                 <a:ea typeface="Arial" pitchFamily="34" charset="-122"/>
                 <a:cs typeface="Arial" pitchFamily="34" charset="-120"/>
               </a:rPr>
-              <a:t>Entrada menor para a empresa e o escritório participa do resultado. Se nada for recuperado ou economizado, não há parcela de êxito.</a:t>
-            </a:r>
-            <a:endParaRPr lang="en-US" sz="1100" dirty="0"/>
+              <a:t>Entrada menor e o escritório participa do resultado. Se nada for recebido ou economizado, não há parcela de êxito.</a:t>
+            </a:r>
+            <a:endParaRPr lang="en-US" sz="1050" dirty="0"/>
           </a:p>
           <a:p>
             <a:pPr indent="0" marL="0">
@@ -5796,7 +5205,7 @@
               <a:buNone/>
             </a:pPr>
             <a:r>
-              <a:rPr lang="en-US" sz="1100" b="1" dirty="0">
+              <a:rPr lang="en-US" sz="1050" b="1" dirty="0">
                 <a:solidFill>
                   <a:srgbClr val="3B1F5E"/>
                 </a:solidFill>
@@ -5806,7 +5215,7 @@
               </a:rPr>
               <a:t>Não incluído no valor</a:t>
             </a:r>
-            <a:endParaRPr lang="en-US" sz="1100" dirty="0"/>
+            <a:endParaRPr lang="en-US" sz="1050" dirty="0"/>
           </a:p>
           <a:p>
             <a:pPr marL="342900" indent="-342900">
@@ -5817,7 +5226,7 @@
               <a:buChar char="•"/>
             </a:pPr>
             <a:r>
-              <a:rPr lang="en-US" sz="1100" dirty="0">
+              <a:rPr lang="en-US" sz="1050" dirty="0">
                 <a:solidFill>
                   <a:srgbClr val="1F1235"/>
                 </a:solidFill>
@@ -5827,154 +5236,9 @@
               </a:rPr>
               <a:t>Custas e despesas de terceiros (perícia, certidões, deslocamento), reembolsadas com comprovante.</a:t>
             </a:r>
-            <a:endParaRPr lang="en-US" sz="1100" dirty="0"/>
-          </a:p>
-        </p:txBody>
-      </p:sp>
-      <p:sp>
-        <p:nvSpPr>
-          <p:cNvPr id="6" name="Text 3"/>
-          <p:cNvSpPr txBox="1"/>
-          <p:nvPr/>
-        </p:nvSpPr>
-        <p:spPr>
-          <a:xfrm>
-            <a:off x="457200" y="4791456"/>
-            <a:ext cx="6858000" cy="201168"/>
-          </a:xfrm>
-          <a:prstGeom prst="rect">
-            <a:avLst/>
-          </a:prstGeom>
-          <a:noFill/>
-          <a:ln/>
-        </p:spPr>
-        <p:txBody>
-          <a:bodyPr wrap="square" lIns="0" tIns="0" rIns="0" bIns="0" rtlCol="0" anchor="ctr"/>
-          <a:lstStyle/>
-          <a:p>
-            <a:pPr indent="0" marL="0">
-              <a:buNone/>
-            </a:pPr>
-            <a:r>
-              <a:rPr lang="en-US" sz="700" dirty="0">
-                <a:solidFill>
-                  <a:srgbClr val="B89BE0"/>
-                </a:solidFill>
-                <a:latin typeface="Arial" pitchFamily="34" charset="0"/>
-                <a:ea typeface="Arial" pitchFamily="34" charset="-122"/>
-                <a:cs typeface="Arial" pitchFamily="34" charset="-120"/>
-              </a:rPr>
-              <a:t>Kit de Gestão para Advogados · modelo v1.0 · set/2026</a:t>
-            </a:r>
-            <a:endParaRPr lang="en-US" sz="700" dirty="0"/>
-          </a:p>
-        </p:txBody>
-      </p:sp>
-      <p:sp>
-        <p:nvSpPr>
-          <p:cNvPr id="7" name="Shape 4"/>
-          <p:cNvSpPr/>
-          <p:nvPr/>
-        </p:nvSpPr>
-        <p:spPr>
-          <a:xfrm>
-            <a:off x="8229600" y="4818888"/>
-            <a:ext cx="211226" cy="70409"/>
-          </a:xfrm>
-          <a:prstGeom prst="roundRect">
-            <a:avLst>
-              <a:gd name="adj" fmla="val 42857"/>
-            </a:avLst>
-          </a:prstGeom>
-          <a:solidFill>
-            <a:srgbClr val="7A5AA8"/>
-          </a:solidFill>
-          <a:ln w="12700">
-            <a:solidFill>
-              <a:srgbClr val="7A5AA8"/>
-            </a:solidFill>
-            <a:prstDash val="solid"/>
-          </a:ln>
-        </p:spPr>
-      </p:sp>
-      <p:sp>
-        <p:nvSpPr>
-          <p:cNvPr id="8" name="Shape 5"/>
-          <p:cNvSpPr/>
-          <p:nvPr/>
-        </p:nvSpPr>
-        <p:spPr>
-          <a:xfrm>
-            <a:off x="8279892" y="4728362"/>
-            <a:ext cx="211226" cy="70409"/>
-          </a:xfrm>
-          <a:prstGeom prst="roundRect">
-            <a:avLst>
-              <a:gd name="adj" fmla="val 42857"/>
-            </a:avLst>
-          </a:prstGeom>
-          <a:solidFill>
-            <a:srgbClr val="3B1F5E"/>
-          </a:solidFill>
-          <a:ln w="12700">
-            <a:solidFill>
-              <a:srgbClr val="3B1F5E"/>
-            </a:solidFill>
-            <a:prstDash val="solid"/>
-          </a:ln>
-        </p:spPr>
-      </p:sp>
-      <p:sp>
-        <p:nvSpPr>
-          <p:cNvPr id="9" name="Shape 6"/>
-          <p:cNvSpPr/>
-          <p:nvPr/>
-        </p:nvSpPr>
-        <p:spPr>
-          <a:xfrm>
-            <a:off x="8330184" y="4637837"/>
-            <a:ext cx="211226" cy="70409"/>
-          </a:xfrm>
-          <a:prstGeom prst="roundRect">
-            <a:avLst>
-              <a:gd name="adj" fmla="val 42857"/>
-            </a:avLst>
-          </a:prstGeom>
-          <a:solidFill>
-            <a:srgbClr val="3B1F5E"/>
-          </a:solidFill>
-          <a:ln w="12700">
-            <a:solidFill>
-              <a:srgbClr val="3B1F5E"/>
-            </a:solidFill>
-            <a:prstDash val="solid"/>
-          </a:ln>
-        </p:spPr>
-      </p:sp>
-      <p:sp>
-        <p:nvSpPr>
-          <p:cNvPr id="10" name="Shape 7"/>
-          <p:cNvSpPr/>
-          <p:nvPr/>
-        </p:nvSpPr>
-        <p:spPr>
-          <a:xfrm>
-            <a:off x="8541410" y="4839005"/>
-            <a:ext cx="65380" cy="65380"/>
-          </a:xfrm>
-          <a:prstGeom prst="ellipse">
-            <a:avLst/>
-          </a:prstGeom>
-          <a:solidFill>
-            <a:srgbClr val="FFC83D"/>
-          </a:solidFill>
-          <a:ln w="12700">
-            <a:solidFill>
-              <a:srgbClr val="FFC83D"/>
-            </a:solidFill>
-            <a:prstDash val="solid"/>
-          </a:ln>
-        </p:spPr>
+            <a:endParaRPr lang="en-US" sz="1050" dirty="0"/>
+          </a:p>
+        </p:txBody>
       </p:sp>
     </p:spTree>
   </p:cSld>
@@ -5987,13 +5251,6 @@
 <file path=ppt/slides/slide6.xml><?xml version="1.0" encoding="utf-8"?>
 <p:sld xmlns:a="http://schemas.openxmlformats.org/drawingml/2006/main" xmlns:r="http://schemas.openxmlformats.org/officeDocument/2006/relationships" xmlns:p="http://schemas.openxmlformats.org/presentationml/2006/main">
   <p:cSld name="Slide 6">
-    <p:bg>
-      <p:bgPr>
-        <a:solidFill>
-          <a:srgbClr val="FFFFFF"/>
-        </a:solidFill>
-      </p:bgPr>
-    </p:bg>
     <p:spTree>
       <p:nvGrpSpPr>
         <p:cNvPr id="1" name=""/>
@@ -6082,7 +5339,7 @@
                 <a:ea typeface="Arial" pitchFamily="34" charset="-122"/>
                 <a:cs typeface="Arial" pitchFamily="34" charset="-120"/>
               </a:rPr>
-              <a:t>Entrada de 30% na assinatura do contrato e quatro parcelas mensais no dia 10, por Pix ou boleto.</a:t>
+              <a:t>Entrada de 40 % na aceitação da proposta e três parcelas mensais, por Pix. Datas contadas da proposta (14/09/2026).</a:t>
             </a:r>
             <a:endParaRPr lang="en-US" sz="1200" dirty="0"/>
           </a:p>
@@ -6390,7 +5647,7 @@
                   </a:tcPr>
                 </a:tc>
               </a:tr>
-              <a:tr h="310896">
+              <a:tr h="329184">
                 <a:tc>
                   <a:txBody>
                     <a:bodyPr/>
@@ -6408,7 +5665,7 @@
                           <a:ea typeface="Arial" pitchFamily="34" charset="-122"/>
                           <a:cs typeface="Arial" pitchFamily="34" charset="-120"/>
                         </a:rPr>
-                        <a:t>Entrada (30%)</a:t>
+                        <a:t>Entrada (40 %)</a:t>
                       </a:r>
                       <a:endParaRPr lang="en-US" sz="1050" dirty="0">
                         <a:latin typeface="Arial" charset="0"/>
@@ -6476,7 +5733,7 @@
                           <a:ea typeface="Arial" pitchFamily="34" charset="-122"/>
                           <a:cs typeface="Arial" pitchFamily="34" charset="-120"/>
                         </a:rPr>
-                        <a:t>na assinatura</a:t>
+                        <a:t>na aceitação</a:t>
                       </a:r>
                       <a:endParaRPr lang="en-US" sz="1050" dirty="0">
                         <a:latin typeface="Arial" charset="0"/>
@@ -6544,7 +5801,7 @@
                           <a:ea typeface="Arial" pitchFamily="34" charset="-122"/>
                           <a:cs typeface="Arial" pitchFamily="34" charset="-120"/>
                         </a:rPr>
-                        <a:t>R$ 4.320</a:t>
+                        <a:t>R$ 2.800</a:t>
                       </a:r>
                       <a:endParaRPr lang="en-US" sz="1050" dirty="0">
                         <a:latin typeface="Arial" charset="0"/>
@@ -6612,7 +5869,7 @@
                           <a:ea typeface="Arial" pitchFamily="34" charset="-122"/>
                           <a:cs typeface="Arial" pitchFamily="34" charset="-120"/>
                         </a:rPr>
-                        <a:t>R$ 2.880</a:t>
+                        <a:t>R$ 1.800</a:t>
                       </a:r>
                       <a:endParaRPr lang="en-US" sz="1050" dirty="0">
                         <a:latin typeface="Arial" charset="0"/>
@@ -6664,7 +5921,7 @@
                   </a:tcPr>
                 </a:tc>
               </a:tr>
-              <a:tr h="310896">
+              <a:tr h="329184">
                 <a:tc>
                   <a:txBody>
                     <a:bodyPr/>
@@ -6750,7 +6007,7 @@
                           <a:ea typeface="Arial" pitchFamily="34" charset="-122"/>
                           <a:cs typeface="Arial" pitchFamily="34" charset="-120"/>
                         </a:rPr>
-                        <a:t>10/11/2026</a:t>
+                        <a:t>14/10/2026</a:t>
                       </a:r>
                       <a:endParaRPr lang="en-US" sz="1050" dirty="0">
                         <a:latin typeface="Arial" charset="0"/>
@@ -6818,7 +6075,7 @@
                           <a:ea typeface="Arial" pitchFamily="34" charset="-122"/>
                           <a:cs typeface="Arial" pitchFamily="34" charset="-120"/>
                         </a:rPr>
-                        <a:t>R$ 2.520</a:t>
+                        <a:t>R$ 1.400</a:t>
                       </a:r>
                       <a:endParaRPr lang="en-US" sz="1050" dirty="0">
                         <a:latin typeface="Arial" charset="0"/>
@@ -6886,7 +6143,7 @@
                           <a:ea typeface="Arial" pitchFamily="34" charset="-122"/>
                           <a:cs typeface="Arial" pitchFamily="34" charset="-120"/>
                         </a:rPr>
-                        <a:t>R$ 1.680</a:t>
+                        <a:t>R$ 900</a:t>
                       </a:r>
                       <a:endParaRPr lang="en-US" sz="1050" dirty="0">
                         <a:latin typeface="Arial" charset="0"/>
@@ -6938,7 +6195,7 @@
                   </a:tcPr>
                 </a:tc>
               </a:tr>
-              <a:tr h="310896">
+              <a:tr h="329184">
                 <a:tc>
                   <a:txBody>
                     <a:bodyPr/>
@@ -7024,7 +6281,7 @@
                           <a:ea typeface="Arial" pitchFamily="34" charset="-122"/>
                           <a:cs typeface="Arial" pitchFamily="34" charset="-120"/>
                         </a:rPr>
-                        <a:t>10/12/2026</a:t>
+                        <a:t>13/11/2026</a:t>
                       </a:r>
                       <a:endParaRPr lang="en-US" sz="1050" dirty="0">
                         <a:latin typeface="Arial" charset="0"/>
@@ -7092,7 +6349,7 @@
                           <a:ea typeface="Arial" pitchFamily="34" charset="-122"/>
                           <a:cs typeface="Arial" pitchFamily="34" charset="-120"/>
                         </a:rPr>
-                        <a:t>R$ 2.520</a:t>
+                        <a:t>R$ 1.400</a:t>
                       </a:r>
                       <a:endParaRPr lang="en-US" sz="1050" dirty="0">
                         <a:latin typeface="Arial" charset="0"/>
@@ -7160,7 +6417,7 @@
                           <a:ea typeface="Arial" pitchFamily="34" charset="-122"/>
                           <a:cs typeface="Arial" pitchFamily="34" charset="-120"/>
                         </a:rPr>
-                        <a:t>R$ 1.680</a:t>
+                        <a:t>R$ 900</a:t>
                       </a:r>
                       <a:endParaRPr lang="en-US" sz="1050" dirty="0">
                         <a:latin typeface="Arial" charset="0"/>
@@ -7212,7 +6469,7 @@
                   </a:tcPr>
                 </a:tc>
               </a:tr>
-              <a:tr h="310896">
+              <a:tr h="329184">
                 <a:tc>
                   <a:txBody>
                     <a:bodyPr/>
@@ -7298,7 +6555,7 @@
                           <a:ea typeface="Arial" pitchFamily="34" charset="-122"/>
                           <a:cs typeface="Arial" pitchFamily="34" charset="-120"/>
                         </a:rPr>
-                        <a:t>10/01/2027</a:t>
+                        <a:t>13/12/2026</a:t>
                       </a:r>
                       <a:endParaRPr lang="en-US" sz="1050" dirty="0">
                         <a:latin typeface="Arial" charset="0"/>
@@ -7366,7 +6623,7 @@
                           <a:ea typeface="Arial" pitchFamily="34" charset="-122"/>
                           <a:cs typeface="Arial" pitchFamily="34" charset="-120"/>
                         </a:rPr>
-                        <a:t>R$ 2.520</a:t>
+                        <a:t>R$ 1.400</a:t>
                       </a:r>
                       <a:endParaRPr lang="en-US" sz="1050" dirty="0">
                         <a:latin typeface="Arial" charset="0"/>
@@ -7434,7 +6691,7 @@
                           <a:ea typeface="Arial" pitchFamily="34" charset="-122"/>
                           <a:cs typeface="Arial" pitchFamily="34" charset="-120"/>
                         </a:rPr>
-                        <a:t>R$ 1.680</a:t>
+                        <a:t>R$ 900</a:t>
                       </a:r>
                       <a:endParaRPr lang="en-US" sz="1050" dirty="0">
                         <a:latin typeface="Arial" charset="0"/>
@@ -7486,281 +6743,7 @@
                   </a:tcPr>
                 </a:tc>
               </a:tr>
-              <a:tr h="310896">
-                <a:tc>
-                  <a:txBody>
-                    <a:bodyPr/>
-                    <a:lstStyle/>
-                    <a:p>
-                      <a:pPr algn="l" indent="0" marL="0">
-                        <a:buNone/>
-                      </a:pPr>
-                      <a:r>
-                        <a:rPr lang="en-US" sz="1050" dirty="0">
-                          <a:solidFill>
-                            <a:srgbClr val="1F1235"/>
-                          </a:solidFill>
-                          <a:latin typeface="Arial" pitchFamily="34" charset="0"/>
-                          <a:ea typeface="Arial" pitchFamily="34" charset="-122"/>
-                          <a:cs typeface="Arial" pitchFamily="34" charset="-120"/>
-                        </a:rPr>
-                        <a:t>4ª parcela</a:t>
-                      </a:r>
-                      <a:endParaRPr lang="en-US" sz="1050" dirty="0">
-                        <a:latin typeface="Arial" charset="0"/>
-                        <a:ea typeface="Arial" charset="0"/>
-                        <a:cs typeface="Arial" charset="0"/>
-                      </a:endParaRPr>
-                    </a:p>
-                  </a:txBody>
-                  <a:tcPr marL="54864" marR="54864" marT="54864" marB="54864" anchor="ctr">
-                    <a:lnL w="9525" cap="flat" cmpd="sng" algn="ctr">
-                      <a:solidFill>
-                        <a:srgbClr val="DCD2EC"/>
-                      </a:solidFill>
-                      <a:prstDash val="solid"/>
-                      <a:round/>
-                      <a:headEnd type="none" w="med" len="med"/>
-                      <a:tailEnd type="none" w="med" len="med"/>
-                    </a:lnL>
-                    <a:lnR w="9525" cap="flat" cmpd="sng" algn="ctr">
-                      <a:solidFill>
-                        <a:srgbClr val="DCD2EC"/>
-                      </a:solidFill>
-                      <a:prstDash val="solid"/>
-                      <a:round/>
-                      <a:headEnd type="none" w="med" len="med"/>
-                      <a:tailEnd type="none" w="med" len="med"/>
-                    </a:lnR>
-                    <a:lnT w="9525" cap="flat" cmpd="sng" algn="ctr">
-                      <a:solidFill>
-                        <a:srgbClr val="DCD2EC"/>
-                      </a:solidFill>
-                      <a:prstDash val="solid"/>
-                      <a:round/>
-                      <a:headEnd type="none" w="med" len="med"/>
-                      <a:tailEnd type="none" w="med" len="med"/>
-                    </a:lnT>
-                    <a:lnB w="9525" cap="flat" cmpd="sng" algn="ctr">
-                      <a:solidFill>
-                        <a:srgbClr val="DCD2EC"/>
-                      </a:solidFill>
-                      <a:prstDash val="solid"/>
-                      <a:round/>
-                      <a:headEnd type="none" w="med" len="med"/>
-                      <a:tailEnd type="none" w="med" len="med"/>
-                    </a:lnB>
-                    <a:solidFill>
-                      <a:srgbClr val="F3EEFB"/>
-                    </a:solidFill>
-                  </a:tcPr>
-                </a:tc>
-                <a:tc>
-                  <a:txBody>
-                    <a:bodyPr/>
-                    <a:lstStyle/>
-                    <a:p>
-                      <a:pPr algn="l" indent="0" marL="0">
-                        <a:buNone/>
-                      </a:pPr>
-                      <a:r>
-                        <a:rPr lang="en-US" sz="1050" dirty="0">
-                          <a:solidFill>
-                            <a:srgbClr val="1F1235"/>
-                          </a:solidFill>
-                          <a:latin typeface="Arial" pitchFamily="34" charset="0"/>
-                          <a:ea typeface="Arial" pitchFamily="34" charset="-122"/>
-                          <a:cs typeface="Arial" pitchFamily="34" charset="-120"/>
-                        </a:rPr>
-                        <a:t>10/02/2027</a:t>
-                      </a:r>
-                      <a:endParaRPr lang="en-US" sz="1050" dirty="0">
-                        <a:latin typeface="Arial" charset="0"/>
-                        <a:ea typeface="Arial" charset="0"/>
-                        <a:cs typeface="Arial" charset="0"/>
-                      </a:endParaRPr>
-                    </a:p>
-                  </a:txBody>
-                  <a:tcPr marL="54864" marR="54864" marT="54864" marB="54864" anchor="ctr">
-                    <a:lnL w="9525" cap="flat" cmpd="sng" algn="ctr">
-                      <a:solidFill>
-                        <a:srgbClr val="DCD2EC"/>
-                      </a:solidFill>
-                      <a:prstDash val="solid"/>
-                      <a:round/>
-                      <a:headEnd type="none" w="med" len="med"/>
-                      <a:tailEnd type="none" w="med" len="med"/>
-                    </a:lnL>
-                    <a:lnR w="9525" cap="flat" cmpd="sng" algn="ctr">
-                      <a:solidFill>
-                        <a:srgbClr val="DCD2EC"/>
-                      </a:solidFill>
-                      <a:prstDash val="solid"/>
-                      <a:round/>
-                      <a:headEnd type="none" w="med" len="med"/>
-                      <a:tailEnd type="none" w="med" len="med"/>
-                    </a:lnR>
-                    <a:lnT w="9525" cap="flat" cmpd="sng" algn="ctr">
-                      <a:solidFill>
-                        <a:srgbClr val="DCD2EC"/>
-                      </a:solidFill>
-                      <a:prstDash val="solid"/>
-                      <a:round/>
-                      <a:headEnd type="none" w="med" len="med"/>
-                      <a:tailEnd type="none" w="med" len="med"/>
-                    </a:lnT>
-                    <a:lnB w="9525" cap="flat" cmpd="sng" algn="ctr">
-                      <a:solidFill>
-                        <a:srgbClr val="DCD2EC"/>
-                      </a:solidFill>
-                      <a:prstDash val="solid"/>
-                      <a:round/>
-                      <a:headEnd type="none" w="med" len="med"/>
-                      <a:tailEnd type="none" w="med" len="med"/>
-                    </a:lnB>
-                    <a:solidFill>
-                      <a:srgbClr val="F3EEFB"/>
-                    </a:solidFill>
-                  </a:tcPr>
-                </a:tc>
-                <a:tc>
-                  <a:txBody>
-                    <a:bodyPr/>
-                    <a:lstStyle/>
-                    <a:p>
-                      <a:pPr algn="r" indent="0" marL="0">
-                        <a:buNone/>
-                      </a:pPr>
-                      <a:r>
-                        <a:rPr lang="en-US" sz="1050" dirty="0">
-                          <a:solidFill>
-                            <a:srgbClr val="1F1235"/>
-                          </a:solidFill>
-                          <a:latin typeface="Arial" pitchFamily="34" charset="0"/>
-                          <a:ea typeface="Arial" pitchFamily="34" charset="-122"/>
-                          <a:cs typeface="Arial" pitchFamily="34" charset="-120"/>
-                        </a:rPr>
-                        <a:t>R$ 2.520</a:t>
-                      </a:r>
-                      <a:endParaRPr lang="en-US" sz="1050" dirty="0">
-                        <a:latin typeface="Arial" charset="0"/>
-                        <a:ea typeface="Arial" charset="0"/>
-                        <a:cs typeface="Arial" charset="0"/>
-                      </a:endParaRPr>
-                    </a:p>
-                  </a:txBody>
-                  <a:tcPr marL="54864" marR="54864" marT="54864" marB="54864" anchor="ctr">
-                    <a:lnL w="9525" cap="flat" cmpd="sng" algn="ctr">
-                      <a:solidFill>
-                        <a:srgbClr val="DCD2EC"/>
-                      </a:solidFill>
-                      <a:prstDash val="solid"/>
-                      <a:round/>
-                      <a:headEnd type="none" w="med" len="med"/>
-                      <a:tailEnd type="none" w="med" len="med"/>
-                    </a:lnL>
-                    <a:lnR w="9525" cap="flat" cmpd="sng" algn="ctr">
-                      <a:solidFill>
-                        <a:srgbClr val="DCD2EC"/>
-                      </a:solidFill>
-                      <a:prstDash val="solid"/>
-                      <a:round/>
-                      <a:headEnd type="none" w="med" len="med"/>
-                      <a:tailEnd type="none" w="med" len="med"/>
-                    </a:lnR>
-                    <a:lnT w="9525" cap="flat" cmpd="sng" algn="ctr">
-                      <a:solidFill>
-                        <a:srgbClr val="DCD2EC"/>
-                      </a:solidFill>
-                      <a:prstDash val="solid"/>
-                      <a:round/>
-                      <a:headEnd type="none" w="med" len="med"/>
-                      <a:tailEnd type="none" w="med" len="med"/>
-                    </a:lnT>
-                    <a:lnB w="9525" cap="flat" cmpd="sng" algn="ctr">
-                      <a:solidFill>
-                        <a:srgbClr val="DCD2EC"/>
-                      </a:solidFill>
-                      <a:prstDash val="solid"/>
-                      <a:round/>
-                      <a:headEnd type="none" w="med" len="med"/>
-                      <a:tailEnd type="none" w="med" len="med"/>
-                    </a:lnB>
-                    <a:solidFill>
-                      <a:srgbClr val="F3EEFB"/>
-                    </a:solidFill>
-                  </a:tcPr>
-                </a:tc>
-                <a:tc>
-                  <a:txBody>
-                    <a:bodyPr/>
-                    <a:lstStyle/>
-                    <a:p>
-                      <a:pPr algn="r" indent="0" marL="0">
-                        <a:buNone/>
-                      </a:pPr>
-                      <a:r>
-                        <a:rPr lang="en-US" sz="1050" dirty="0">
-                          <a:solidFill>
-                            <a:srgbClr val="1F1235"/>
-                          </a:solidFill>
-                          <a:latin typeface="Arial" pitchFamily="34" charset="0"/>
-                          <a:ea typeface="Arial" pitchFamily="34" charset="-122"/>
-                          <a:cs typeface="Arial" pitchFamily="34" charset="-120"/>
-                        </a:rPr>
-                        <a:t>R$ 1.680</a:t>
-                      </a:r>
-                      <a:endParaRPr lang="en-US" sz="1050" dirty="0">
-                        <a:latin typeface="Arial" charset="0"/>
-                        <a:ea typeface="Arial" charset="0"/>
-                        <a:cs typeface="Arial" charset="0"/>
-                      </a:endParaRPr>
-                    </a:p>
-                  </a:txBody>
-                  <a:tcPr marL="54864" marR="54864" marT="54864" marB="54864" anchor="ctr">
-                    <a:lnL w="9525" cap="flat" cmpd="sng" algn="ctr">
-                      <a:solidFill>
-                        <a:srgbClr val="DCD2EC"/>
-                      </a:solidFill>
-                      <a:prstDash val="solid"/>
-                      <a:round/>
-                      <a:headEnd type="none" w="med" len="med"/>
-                      <a:tailEnd type="none" w="med" len="med"/>
-                    </a:lnL>
-                    <a:lnR w="9525" cap="flat" cmpd="sng" algn="ctr">
-                      <a:solidFill>
-                        <a:srgbClr val="DCD2EC"/>
-                      </a:solidFill>
-                      <a:prstDash val="solid"/>
-                      <a:round/>
-                      <a:headEnd type="none" w="med" len="med"/>
-                      <a:tailEnd type="none" w="med" len="med"/>
-                    </a:lnR>
-                    <a:lnT w="9525" cap="flat" cmpd="sng" algn="ctr">
-                      <a:solidFill>
-                        <a:srgbClr val="DCD2EC"/>
-                      </a:solidFill>
-                      <a:prstDash val="solid"/>
-                      <a:round/>
-                      <a:headEnd type="none" w="med" len="med"/>
-                      <a:tailEnd type="none" w="med" len="med"/>
-                    </a:lnT>
-                    <a:lnB w="9525" cap="flat" cmpd="sng" algn="ctr">
-                      <a:solidFill>
-                        <a:srgbClr val="DCD2EC"/>
-                      </a:solidFill>
-                      <a:prstDash val="solid"/>
-                      <a:round/>
-                      <a:headEnd type="none" w="med" len="med"/>
-                      <a:tailEnd type="none" w="med" len="med"/>
-                    </a:lnB>
-                    <a:solidFill>
-                      <a:srgbClr val="F3EEFB"/>
-                    </a:solidFill>
-                  </a:tcPr>
-                </a:tc>
-              </a:tr>
-              <a:tr h="310896">
+              <a:tr h="329184">
                 <a:tc>
                   <a:txBody>
                     <a:bodyPr/>
@@ -7825,7 +6808,7 @@
                       <a:tailEnd type="none" w="med" len="med"/>
                     </a:lnB>
                     <a:solidFill>
-                      <a:srgbClr val="FFFFFF"/>
+                      <a:srgbClr val="F3EEFB"/>
                     </a:solidFill>
                   </a:tcPr>
                 </a:tc>
@@ -7893,7 +6876,7 @@
                       <a:tailEnd type="none" w="med" len="med"/>
                     </a:lnB>
                     <a:solidFill>
-                      <a:srgbClr val="FFFFFF"/>
+                      <a:srgbClr val="F3EEFB"/>
                     </a:solidFill>
                   </a:tcPr>
                 </a:tc>
@@ -7914,7 +6897,7 @@
                           <a:ea typeface="Arial" pitchFamily="34" charset="-122"/>
                           <a:cs typeface="Arial" pitchFamily="34" charset="-120"/>
                         </a:rPr>
-                        <a:t>R$ 14.400</a:t>
+                        <a:t>R$ 7.000</a:t>
                       </a:r>
                       <a:endParaRPr lang="en-US" sz="1050" dirty="0">
                         <a:latin typeface="Arial" charset="0"/>
@@ -7961,7 +6944,7 @@
                       <a:tailEnd type="none" w="med" len="med"/>
                     </a:lnB>
                     <a:solidFill>
-                      <a:srgbClr val="FFFFFF"/>
+                      <a:srgbClr val="F3EEFB"/>
                     </a:solidFill>
                   </a:tcPr>
                 </a:tc>
@@ -7982,7 +6965,7 @@
                           <a:ea typeface="Arial" pitchFamily="34" charset="-122"/>
                           <a:cs typeface="Arial" pitchFamily="34" charset="-120"/>
                         </a:rPr>
-                        <a:t>R$ 9.600 + êxito</a:t>
+                        <a:t>R$ 4.500 + êxito</a:t>
                       </a:r>
                       <a:endParaRPr lang="en-US" sz="1050" dirty="0">
                         <a:latin typeface="Arial" charset="0"/>
@@ -8029,7 +7012,7 @@
                       <a:tailEnd type="none" w="med" len="med"/>
                     </a:lnB>
                     <a:solidFill>
-                      <a:srgbClr val="FFFFFF"/>
+                      <a:srgbClr val="F3EEFB"/>
                     </a:solidFill>
                   </a:tcPr>
                 </a:tc>
@@ -8046,8 +7029,8 @@
         </p:nvSpPr>
         <p:spPr>
           <a:xfrm>
-            <a:off x="457200" y="4041648"/>
-            <a:ext cx="8229600" cy="548640"/>
+            <a:off x="457200" y="3794760"/>
+            <a:ext cx="8229600" cy="777240"/>
           </a:xfrm>
           <a:prstGeom prst="rect">
             <a:avLst/>
@@ -8071,156 +7054,11 @@
                 <a:ea typeface="Arial" pitchFamily="34" charset="-122"/>
                 <a:cs typeface="Arial" pitchFamily="34" charset="-120"/>
               </a:rPr>
-              <a:t>Êxito da opção B: apurado e pago em até 30 dias depois de a empresa receber o valor. Despesas de terceiros: previsão de até R$ 1.500 no primeiro ano, sempre autorizadas antes. Atraso: aviso em 7 dias; condições de reajuste e de rescisão ficam no contrato.</a:t>
+              <a:t>Êxito da opção B: apurado e pago em até 30 dias depois de você receber (ou deixar de pagar) o valor. Despesas de terceiros: previsão de até R$ 1.250 (custas R$ 800, deslocamentos R$ 300, cópias e certidões R$ 150), sempre autorizadas antes. Atraso: aviso em 7 dias; condições de reajuste e de rescisão ficam no contrato.</a:t>
             </a:r>
             <a:endParaRPr lang="en-US" sz="1050" dirty="0"/>
           </a:p>
         </p:txBody>
-      </p:sp>
-      <p:sp>
-        <p:nvSpPr>
-          <p:cNvPr id="6" name="Text 3"/>
-          <p:cNvSpPr txBox="1"/>
-          <p:nvPr/>
-        </p:nvSpPr>
-        <p:spPr>
-          <a:xfrm>
-            <a:off x="457200" y="4791456"/>
-            <a:ext cx="6858000" cy="201168"/>
-          </a:xfrm>
-          <a:prstGeom prst="rect">
-            <a:avLst/>
-          </a:prstGeom>
-          <a:noFill/>
-          <a:ln/>
-        </p:spPr>
-        <p:txBody>
-          <a:bodyPr wrap="square" lIns="0" tIns="0" rIns="0" bIns="0" rtlCol="0" anchor="ctr"/>
-          <a:lstStyle/>
-          <a:p>
-            <a:pPr indent="0" marL="0">
-              <a:buNone/>
-            </a:pPr>
-            <a:r>
-              <a:rPr lang="en-US" sz="700" dirty="0">
-                <a:solidFill>
-                  <a:srgbClr val="B89BE0"/>
-                </a:solidFill>
-                <a:latin typeface="Arial" pitchFamily="34" charset="0"/>
-                <a:ea typeface="Arial" pitchFamily="34" charset="-122"/>
-                <a:cs typeface="Arial" pitchFamily="34" charset="-120"/>
-              </a:rPr>
-              <a:t>Kit de Gestão para Advogados · modelo v1.0 · set/2026</a:t>
-            </a:r>
-            <a:endParaRPr lang="en-US" sz="700" dirty="0"/>
-          </a:p>
-        </p:txBody>
-      </p:sp>
-      <p:sp>
-        <p:nvSpPr>
-          <p:cNvPr id="7" name="Shape 4"/>
-          <p:cNvSpPr/>
-          <p:nvPr/>
-        </p:nvSpPr>
-        <p:spPr>
-          <a:xfrm>
-            <a:off x="8229600" y="4818888"/>
-            <a:ext cx="211226" cy="70409"/>
-          </a:xfrm>
-          <a:prstGeom prst="roundRect">
-            <a:avLst>
-              <a:gd name="adj" fmla="val 42857"/>
-            </a:avLst>
-          </a:prstGeom>
-          <a:solidFill>
-            <a:srgbClr val="7A5AA8"/>
-          </a:solidFill>
-          <a:ln w="12700">
-            <a:solidFill>
-              <a:srgbClr val="7A5AA8"/>
-            </a:solidFill>
-            <a:prstDash val="solid"/>
-          </a:ln>
-        </p:spPr>
-      </p:sp>
-      <p:sp>
-        <p:nvSpPr>
-          <p:cNvPr id="8" name="Shape 5"/>
-          <p:cNvSpPr/>
-          <p:nvPr/>
-        </p:nvSpPr>
-        <p:spPr>
-          <a:xfrm>
-            <a:off x="8279892" y="4728362"/>
-            <a:ext cx="211226" cy="70409"/>
-          </a:xfrm>
-          <a:prstGeom prst="roundRect">
-            <a:avLst>
-              <a:gd name="adj" fmla="val 42857"/>
-            </a:avLst>
-          </a:prstGeom>
-          <a:solidFill>
-            <a:srgbClr val="3B1F5E"/>
-          </a:solidFill>
-          <a:ln w="12700">
-            <a:solidFill>
-              <a:srgbClr val="3B1F5E"/>
-            </a:solidFill>
-            <a:prstDash val="solid"/>
-          </a:ln>
-        </p:spPr>
-      </p:sp>
-      <p:sp>
-        <p:nvSpPr>
-          <p:cNvPr id="9" name="Shape 6"/>
-          <p:cNvSpPr/>
-          <p:nvPr/>
-        </p:nvSpPr>
-        <p:spPr>
-          <a:xfrm>
-            <a:off x="8330184" y="4637837"/>
-            <a:ext cx="211226" cy="70409"/>
-          </a:xfrm>
-          <a:prstGeom prst="roundRect">
-            <a:avLst>
-              <a:gd name="adj" fmla="val 42857"/>
-            </a:avLst>
-          </a:prstGeom>
-          <a:solidFill>
-            <a:srgbClr val="3B1F5E"/>
-          </a:solidFill>
-          <a:ln w="12700">
-            <a:solidFill>
-              <a:srgbClr val="3B1F5E"/>
-            </a:solidFill>
-            <a:prstDash val="solid"/>
-          </a:ln>
-        </p:spPr>
-      </p:sp>
-      <p:sp>
-        <p:nvSpPr>
-          <p:cNvPr id="10" name="Shape 7"/>
-          <p:cNvSpPr/>
-          <p:nvPr/>
-        </p:nvSpPr>
-        <p:spPr>
-          <a:xfrm>
-            <a:off x="8541410" y="4839005"/>
-            <a:ext cx="65380" cy="65380"/>
-          </a:xfrm>
-          <a:prstGeom prst="ellipse">
-            <a:avLst/>
-          </a:prstGeom>
-          <a:solidFill>
-            <a:srgbClr val="FFC83D"/>
-          </a:solidFill>
-          <a:ln w="12700">
-            <a:solidFill>
-              <a:srgbClr val="FFC83D"/>
-            </a:solidFill>
-            <a:prstDash val="solid"/>
-          </a:ln>
-        </p:spPr>
       </p:sp>
     </p:spTree>
   </p:cSld>
@@ -8233,13 +7071,6 @@
 <file path=ppt/slides/slide7.xml><?xml version="1.0" encoding="utf-8"?>
 <p:sld xmlns:a="http://schemas.openxmlformats.org/drawingml/2006/main" xmlns:r="http://schemas.openxmlformats.org/officeDocument/2006/relationships" xmlns:p="http://schemas.openxmlformats.org/presentationml/2006/main">
   <p:cSld name="Slide 7">
-    <p:bg>
-      <p:bgPr>
-        <a:solidFill>
-          <a:srgbClr val="FFFFFF"/>
-        </a:solidFill>
-      </p:bgPr>
-    </p:bg>
     <p:spTree>
       <p:nvGrpSpPr>
         <p:cNvPr id="1" name=""/>
@@ -8458,7 +7289,7 @@
                 <a:ea typeface="Arial" pitchFamily="34" charset="-122"/>
                 <a:cs typeface="Arial" pitchFamily="34" charset="-120"/>
               </a:rPr>
-              <a:t>Negociação com o fornecedor em nome da empresa.</a:t>
+              <a:t>Conversa com a outra parte em seu nome, na tentativa de acordo.</a:t>
             </a:r>
             <a:endParaRPr lang="en-US" sz="1100" dirty="0"/>
           </a:p>
@@ -8479,7 +7310,7 @@
                 <a:ea typeface="Arial" pitchFamily="34" charset="-122"/>
                 <a:cs typeface="Arial" pitchFamily="34" charset="-120"/>
               </a:rPr>
-              <a:t>Até duas reuniões por mês com a empresa (presenciais ou por vídeo).</a:t>
+              <a:t>Até duas reuniões por mês com você (presenciais ou por vídeo).</a:t>
             </a:r>
             <a:endParaRPr lang="en-US" sz="1100" dirty="0"/>
           </a:p>
@@ -8500,7 +7331,7 @@
                 <a:ea typeface="Arial" pitchFamily="34" charset="-122"/>
                 <a:cs typeface="Arial" pitchFamily="34" charset="-120"/>
               </a:rPr>
-              <a:t>Relatório mensal por e-mail e atendimento em horário comercial.</a:t>
+              <a:t>Relatório de andamento por e-mail a cada 30 dias e atendimento em horário comercial.</a:t>
             </a:r>
             <a:endParaRPr lang="en-US" sz="1100" dirty="0"/>
           </a:p>
@@ -8672,7 +7503,7 @@
                 <a:ea typeface="Arial" pitchFamily="34" charset="-122"/>
                 <a:cs typeface="Arial" pitchFamily="34" charset="-120"/>
               </a:rPr>
-              <a:t>Outros contratos ou demandas da empresa.</a:t>
+              <a:t>Outros contratos ou assuntos.</a:t>
             </a:r>
             <a:endParaRPr lang="en-US" sz="1100" dirty="0"/>
           </a:p>
@@ -8719,151 +7550,6 @@
             <a:endParaRPr lang="en-US" sz="1100" dirty="0"/>
           </a:p>
         </p:txBody>
-      </p:sp>
-      <p:sp>
-        <p:nvSpPr>
-          <p:cNvPr id="10" name="Text 8"/>
-          <p:cNvSpPr txBox="1"/>
-          <p:nvPr/>
-        </p:nvSpPr>
-        <p:spPr>
-          <a:xfrm>
-            <a:off x="457200" y="4791456"/>
-            <a:ext cx="6858000" cy="201168"/>
-          </a:xfrm>
-          <a:prstGeom prst="rect">
-            <a:avLst/>
-          </a:prstGeom>
-          <a:noFill/>
-          <a:ln/>
-        </p:spPr>
-        <p:txBody>
-          <a:bodyPr wrap="square" lIns="0" tIns="0" rIns="0" bIns="0" rtlCol="0" anchor="ctr"/>
-          <a:lstStyle/>
-          <a:p>
-            <a:pPr indent="0" marL="0">
-              <a:buNone/>
-            </a:pPr>
-            <a:r>
-              <a:rPr lang="en-US" sz="700" dirty="0">
-                <a:solidFill>
-                  <a:srgbClr val="B89BE0"/>
-                </a:solidFill>
-                <a:latin typeface="Arial" pitchFamily="34" charset="0"/>
-                <a:ea typeface="Arial" pitchFamily="34" charset="-122"/>
-                <a:cs typeface="Arial" pitchFamily="34" charset="-120"/>
-              </a:rPr>
-              <a:t>Kit de Gestão para Advogados · modelo v1.0 · set/2026</a:t>
-            </a:r>
-            <a:endParaRPr lang="en-US" sz="700" dirty="0"/>
-          </a:p>
-        </p:txBody>
-      </p:sp>
-      <p:sp>
-        <p:nvSpPr>
-          <p:cNvPr id="11" name="Shape 9"/>
-          <p:cNvSpPr/>
-          <p:nvPr/>
-        </p:nvSpPr>
-        <p:spPr>
-          <a:xfrm>
-            <a:off x="8229600" y="4818888"/>
-            <a:ext cx="211226" cy="70409"/>
-          </a:xfrm>
-          <a:prstGeom prst="roundRect">
-            <a:avLst>
-              <a:gd name="adj" fmla="val 42857"/>
-            </a:avLst>
-          </a:prstGeom>
-          <a:solidFill>
-            <a:srgbClr val="7A5AA8"/>
-          </a:solidFill>
-          <a:ln w="12700">
-            <a:solidFill>
-              <a:srgbClr val="7A5AA8"/>
-            </a:solidFill>
-            <a:prstDash val="solid"/>
-          </a:ln>
-        </p:spPr>
-      </p:sp>
-      <p:sp>
-        <p:nvSpPr>
-          <p:cNvPr id="12" name="Shape 10"/>
-          <p:cNvSpPr/>
-          <p:nvPr/>
-        </p:nvSpPr>
-        <p:spPr>
-          <a:xfrm>
-            <a:off x="8279892" y="4728362"/>
-            <a:ext cx="211226" cy="70409"/>
-          </a:xfrm>
-          <a:prstGeom prst="roundRect">
-            <a:avLst>
-              <a:gd name="adj" fmla="val 42857"/>
-            </a:avLst>
-          </a:prstGeom>
-          <a:solidFill>
-            <a:srgbClr val="3B1F5E"/>
-          </a:solidFill>
-          <a:ln w="12700">
-            <a:solidFill>
-              <a:srgbClr val="3B1F5E"/>
-            </a:solidFill>
-            <a:prstDash val="solid"/>
-          </a:ln>
-        </p:spPr>
-      </p:sp>
-      <p:sp>
-        <p:nvSpPr>
-          <p:cNvPr id="13" name="Shape 11"/>
-          <p:cNvSpPr/>
-          <p:nvPr/>
-        </p:nvSpPr>
-        <p:spPr>
-          <a:xfrm>
-            <a:off x="8330184" y="4637837"/>
-            <a:ext cx="211226" cy="70409"/>
-          </a:xfrm>
-          <a:prstGeom prst="roundRect">
-            <a:avLst>
-              <a:gd name="adj" fmla="val 42857"/>
-            </a:avLst>
-          </a:prstGeom>
-          <a:solidFill>
-            <a:srgbClr val="3B1F5E"/>
-          </a:solidFill>
-          <a:ln w="12700">
-            <a:solidFill>
-              <a:srgbClr val="3B1F5E"/>
-            </a:solidFill>
-            <a:prstDash val="solid"/>
-          </a:ln>
-        </p:spPr>
-      </p:sp>
-      <p:sp>
-        <p:nvSpPr>
-          <p:cNvPr id="14" name="Shape 12"/>
-          <p:cNvSpPr/>
-          <p:nvPr/>
-        </p:nvSpPr>
-        <p:spPr>
-          <a:xfrm>
-            <a:off x="8541410" y="4839005"/>
-            <a:ext cx="65380" cy="65380"/>
-          </a:xfrm>
-          <a:prstGeom prst="ellipse">
-            <a:avLst/>
-          </a:prstGeom>
-          <a:solidFill>
-            <a:srgbClr val="FFC83D"/>
-          </a:solidFill>
-          <a:ln w="12700">
-            <a:solidFill>
-              <a:srgbClr val="FFC83D"/>
-            </a:solidFill>
-            <a:prstDash val="solid"/>
-          </a:ln>
-        </p:spPr>
       </p:sp>
     </p:spTree>
   </p:cSld>
@@ -8876,13 +7562,6 @@
 <file path=ppt/slides/slide8.xml><?xml version="1.0" encoding="utf-8"?>
 <p:sld xmlns:a="http://schemas.openxmlformats.org/drawingml/2006/main" xmlns:r="http://schemas.openxmlformats.org/officeDocument/2006/relationships" xmlns:p="http://schemas.openxmlformats.org/presentationml/2006/main">
   <p:cSld name="Slide 8">
-    <p:bg>
-      <p:bgPr>
-        <a:solidFill>
-          <a:srgbClr val="FFFFFF"/>
-        </a:solidFill>
-      </p:bgPr>
-    </p:bg>
     <p:spTree>
       <p:nvGrpSpPr>
         <p:cNvPr id="1" name=""/>
@@ -9224,7 +7903,7 @@
                 <a:ea typeface="Arial" pitchFamily="34" charset="-122"/>
                 <a:cs typeface="Arial" pitchFamily="34" charset="-120"/>
               </a:rPr>
-              <a:t>Relatório mensal</a:t>
+              <a:t>Relatório de andamento</a:t>
             </a:r>
             <a:endParaRPr lang="en-US" sz="1300" dirty="0"/>
           </a:p>
@@ -9263,7 +7942,7 @@
                 <a:ea typeface="Arial" pitchFamily="34" charset="-122"/>
                 <a:cs typeface="Arial" pitchFamily="34" charset="-120"/>
               </a:rPr>
-              <a:t>o que aconteceu, o que vem, custos e despesas do mês, em uma página</a:t>
+              <a:t>o que aconteceu, o que vem, custos e despesas do período, em uma página</a:t>
             </a:r>
             <a:endParaRPr lang="en-US" sz="1050" dirty="0"/>
           </a:p>
@@ -9409,7 +8088,7 @@
                 <a:ea typeface="Arial" pitchFamily="34" charset="-122"/>
                 <a:cs typeface="Arial" pitchFamily="34" charset="-120"/>
               </a:rPr>
-              <a:t>a e-mail e WhatsApp comercial, em até 2 dias úteis, de segunda a sexta, das 9h às 18h</a:t>
+              <a:t>a e-mail e WhatsApp do escritório, em até 2 dias úteis, de segunda a sexta, das 9h às 18h</a:t>
             </a:r>
             <a:endParaRPr lang="en-US" sz="1050" dirty="0"/>
           </a:p>
@@ -9555,7 +8234,7 @@
                 <a:ea typeface="Arial" pitchFamily="34" charset="-122"/>
                 <a:cs typeface="Arial" pitchFamily="34" charset="-120"/>
               </a:rPr>
-              <a:t>aviso de qualquer movimento que mude prazo, custo ou decisão, com o que muda para a empresa</a:t>
+              <a:t>aviso de qualquer movimento que mude prazo, custo ou decisão, com o que muda para você</a:t>
             </a:r>
             <a:endParaRPr lang="en-US" sz="1050" dirty="0"/>
           </a:p>
@@ -9599,151 +8278,6 @@
             <a:endParaRPr lang="en-US" sz="1100" dirty="0"/>
           </a:p>
         </p:txBody>
-      </p:sp>
-      <p:sp>
-        <p:nvSpPr>
-          <p:cNvPr id="21" name="Text 19"/>
-          <p:cNvSpPr txBox="1"/>
-          <p:nvPr/>
-        </p:nvSpPr>
-        <p:spPr>
-          <a:xfrm>
-            <a:off x="457200" y="4791456"/>
-            <a:ext cx="6858000" cy="201168"/>
-          </a:xfrm>
-          <a:prstGeom prst="rect">
-            <a:avLst/>
-          </a:prstGeom>
-          <a:noFill/>
-          <a:ln/>
-        </p:spPr>
-        <p:txBody>
-          <a:bodyPr wrap="square" lIns="0" tIns="0" rIns="0" bIns="0" rtlCol="0" anchor="ctr"/>
-          <a:lstStyle/>
-          <a:p>
-            <a:pPr indent="0" marL="0">
-              <a:buNone/>
-            </a:pPr>
-            <a:r>
-              <a:rPr lang="en-US" sz="700" dirty="0">
-                <a:solidFill>
-                  <a:srgbClr val="B89BE0"/>
-                </a:solidFill>
-                <a:latin typeface="Arial" pitchFamily="34" charset="0"/>
-                <a:ea typeface="Arial" pitchFamily="34" charset="-122"/>
-                <a:cs typeface="Arial" pitchFamily="34" charset="-120"/>
-              </a:rPr>
-              <a:t>Kit de Gestão para Advogados · modelo v1.0 · set/2026</a:t>
-            </a:r>
-            <a:endParaRPr lang="en-US" sz="700" dirty="0"/>
-          </a:p>
-        </p:txBody>
-      </p:sp>
-      <p:sp>
-        <p:nvSpPr>
-          <p:cNvPr id="22" name="Shape 20"/>
-          <p:cNvSpPr/>
-          <p:nvPr/>
-        </p:nvSpPr>
-        <p:spPr>
-          <a:xfrm>
-            <a:off x="8229600" y="4818888"/>
-            <a:ext cx="211226" cy="70409"/>
-          </a:xfrm>
-          <a:prstGeom prst="roundRect">
-            <a:avLst>
-              <a:gd name="adj" fmla="val 42857"/>
-            </a:avLst>
-          </a:prstGeom>
-          <a:solidFill>
-            <a:srgbClr val="7A5AA8"/>
-          </a:solidFill>
-          <a:ln w="12700">
-            <a:solidFill>
-              <a:srgbClr val="7A5AA8"/>
-            </a:solidFill>
-            <a:prstDash val="solid"/>
-          </a:ln>
-        </p:spPr>
-      </p:sp>
-      <p:sp>
-        <p:nvSpPr>
-          <p:cNvPr id="23" name="Shape 21"/>
-          <p:cNvSpPr/>
-          <p:nvPr/>
-        </p:nvSpPr>
-        <p:spPr>
-          <a:xfrm>
-            <a:off x="8279892" y="4728362"/>
-            <a:ext cx="211226" cy="70409"/>
-          </a:xfrm>
-          <a:prstGeom prst="roundRect">
-            <a:avLst>
-              <a:gd name="adj" fmla="val 42857"/>
-            </a:avLst>
-          </a:prstGeom>
-          <a:solidFill>
-            <a:srgbClr val="3B1F5E"/>
-          </a:solidFill>
-          <a:ln w="12700">
-            <a:solidFill>
-              <a:srgbClr val="3B1F5E"/>
-            </a:solidFill>
-            <a:prstDash val="solid"/>
-          </a:ln>
-        </p:spPr>
-      </p:sp>
-      <p:sp>
-        <p:nvSpPr>
-          <p:cNvPr id="24" name="Shape 22"/>
-          <p:cNvSpPr/>
-          <p:nvPr/>
-        </p:nvSpPr>
-        <p:spPr>
-          <a:xfrm>
-            <a:off x="8330184" y="4637837"/>
-            <a:ext cx="211226" cy="70409"/>
-          </a:xfrm>
-          <a:prstGeom prst="roundRect">
-            <a:avLst>
-              <a:gd name="adj" fmla="val 42857"/>
-            </a:avLst>
-          </a:prstGeom>
-          <a:solidFill>
-            <a:srgbClr val="3B1F5E"/>
-          </a:solidFill>
-          <a:ln w="12700">
-            <a:solidFill>
-              <a:srgbClr val="3B1F5E"/>
-            </a:solidFill>
-            <a:prstDash val="solid"/>
-          </a:ln>
-        </p:spPr>
-      </p:sp>
-      <p:sp>
-        <p:nvSpPr>
-          <p:cNvPr id="25" name="Shape 23"/>
-          <p:cNvSpPr/>
-          <p:nvPr/>
-        </p:nvSpPr>
-        <p:spPr>
-          <a:xfrm>
-            <a:off x="8541410" y="4839005"/>
-            <a:ext cx="65380" cy="65380"/>
-          </a:xfrm>
-          <a:prstGeom prst="ellipse">
-            <a:avLst/>
-          </a:prstGeom>
-          <a:solidFill>
-            <a:srgbClr val="FFC83D"/>
-          </a:solidFill>
-          <a:ln w="12700">
-            <a:solidFill>
-              <a:srgbClr val="FFC83D"/>
-            </a:solidFill>
-            <a:prstDash val="solid"/>
-          </a:ln>
-        </p:spPr>
       </p:sp>
     </p:spTree>
   </p:cSld>
@@ -9756,13 +8290,6 @@
 <file path=ppt/slides/slide9.xml><?xml version="1.0" encoding="utf-8"?>
 <p:sld xmlns:a="http://schemas.openxmlformats.org/drawingml/2006/main" xmlns:r="http://schemas.openxmlformats.org/officeDocument/2006/relationships" xmlns:p="http://schemas.openxmlformats.org/presentationml/2006/main">
   <p:cSld name="Slide 9">
-    <p:bg>
-      <p:bgPr>
-        <a:solidFill>
-          <a:srgbClr val="FFFFFF"/>
-        </a:solidFill>
-      </p:bgPr>
-    </p:bg>
     <p:spTree>
       <p:nvGrpSpPr>
         <p:cNvPr id="1" name=""/>
@@ -10059,7 +8586,7 @@
                 <a:ea typeface="Arial" pitchFamily="34" charset="-122"/>
                 <a:cs typeface="Arial" pitchFamily="34" charset="-120"/>
               </a:rPr>
-              <a:t>até 30/09/2026</a:t>
+              <a:t>até 29/09/2026</a:t>
             </a:r>
             <a:endParaRPr lang="en-US" sz="1050" dirty="0"/>
           </a:p>
@@ -10228,7 +8755,7 @@
                 <a:ea typeface="Arial" pitchFamily="34" charset="-122"/>
                 <a:cs typeface="Arial" pitchFamily="34" charset="-120"/>
               </a:rPr>
-              <a:t>assinatura e pagamento dos 30%</a:t>
+              <a:t>assinatura e pagamento dos 40 % por Pix</a:t>
             </a:r>
             <a:endParaRPr lang="en-US" sz="1050" dirty="0"/>
           </a:p>
@@ -10267,7 +8794,7 @@
                 <a:ea typeface="Arial" pitchFamily="34" charset="-122"/>
                 <a:cs typeface="Arial" pitchFamily="34" charset="-120"/>
               </a:rPr>
-              <a:t>até 7/10/2026</a:t>
+              <a:t>até 06/10/2026</a:t>
             </a:r>
             <a:endParaRPr lang="en-US" sz="1050" dirty="0"/>
           </a:p>
@@ -10475,7 +9002,7 @@
                 <a:ea typeface="Arial" pitchFamily="34" charset="-122"/>
                 <a:cs typeface="Arial" pitchFamily="34" charset="-120"/>
               </a:rPr>
-              <a:t>semana de 13/10/2026</a:t>
+              <a:t>semana de 12/10/2026</a:t>
             </a:r>
             <a:endParaRPr lang="en-US" sz="1050" dirty="0"/>
           </a:p>
@@ -10605,7 +9132,7 @@
                 <a:ea typeface="Arial" pitchFamily="34" charset="-122"/>
                 <a:cs typeface="Arial" pitchFamily="34" charset="-120"/>
               </a:rPr>
-              <a:t>Primeiro relatório mensal</a:t>
+              <a:t>Primeiro relatório de andamento</a:t>
             </a:r>
             <a:endParaRPr lang="en-US" sz="1200" dirty="0"/>
           </a:p>
@@ -10644,7 +9171,7 @@
                 <a:ea typeface="Arial" pitchFamily="34" charset="-122"/>
                 <a:cs typeface="Arial" pitchFamily="34" charset="-120"/>
               </a:rPr>
-              <a:t>com o resultado da etapa 1 e a agenda da negociação</a:t>
+              <a:t>com o resultado da etapa 1 e o plano da etapa 2</a:t>
             </a:r>
             <a:endParaRPr lang="en-US" sz="1050" dirty="0"/>
           </a:p>
@@ -10683,156 +9210,11 @@
                 <a:ea typeface="Arial" pitchFamily="34" charset="-122"/>
                 <a:cs typeface="Arial" pitchFamily="34" charset="-120"/>
               </a:rPr>
-              <a:t>5/11/2026</a:t>
+              <a:t>até 30/10/2026</a:t>
             </a:r>
             <a:endParaRPr lang="en-US" sz="1050" dirty="0"/>
           </a:p>
         </p:txBody>
-      </p:sp>
-      <p:sp>
-        <p:nvSpPr>
-          <p:cNvPr id="28" name="Text 26"/>
-          <p:cNvSpPr txBox="1"/>
-          <p:nvPr/>
-        </p:nvSpPr>
-        <p:spPr>
-          <a:xfrm>
-            <a:off x="457200" y="4791456"/>
-            <a:ext cx="6858000" cy="201168"/>
-          </a:xfrm>
-          <a:prstGeom prst="rect">
-            <a:avLst/>
-          </a:prstGeom>
-          <a:noFill/>
-          <a:ln/>
-        </p:spPr>
-        <p:txBody>
-          <a:bodyPr wrap="square" lIns="0" tIns="0" rIns="0" bIns="0" rtlCol="0" anchor="ctr"/>
-          <a:lstStyle/>
-          <a:p>
-            <a:pPr indent="0" marL="0">
-              <a:buNone/>
-            </a:pPr>
-            <a:r>
-              <a:rPr lang="en-US" sz="700" dirty="0">
-                <a:solidFill>
-                  <a:srgbClr val="B89BE0"/>
-                </a:solidFill>
-                <a:latin typeface="Arial" pitchFamily="34" charset="0"/>
-                <a:ea typeface="Arial" pitchFamily="34" charset="-122"/>
-                <a:cs typeface="Arial" pitchFamily="34" charset="-120"/>
-              </a:rPr>
-              <a:t>Kit de Gestão para Advogados · modelo v1.0 · set/2026</a:t>
-            </a:r>
-            <a:endParaRPr lang="en-US" sz="700" dirty="0"/>
-          </a:p>
-        </p:txBody>
-      </p:sp>
-      <p:sp>
-        <p:nvSpPr>
-          <p:cNvPr id="29" name="Shape 27"/>
-          <p:cNvSpPr/>
-          <p:nvPr/>
-        </p:nvSpPr>
-        <p:spPr>
-          <a:xfrm>
-            <a:off x="8229600" y="4818888"/>
-            <a:ext cx="211226" cy="70409"/>
-          </a:xfrm>
-          <a:prstGeom prst="roundRect">
-            <a:avLst>
-              <a:gd name="adj" fmla="val 42857"/>
-            </a:avLst>
-          </a:prstGeom>
-          <a:solidFill>
-            <a:srgbClr val="7A5AA8"/>
-          </a:solidFill>
-          <a:ln w="12700">
-            <a:solidFill>
-              <a:srgbClr val="7A5AA8"/>
-            </a:solidFill>
-            <a:prstDash val="solid"/>
-          </a:ln>
-        </p:spPr>
-      </p:sp>
-      <p:sp>
-        <p:nvSpPr>
-          <p:cNvPr id="30" name="Shape 28"/>
-          <p:cNvSpPr/>
-          <p:nvPr/>
-        </p:nvSpPr>
-        <p:spPr>
-          <a:xfrm>
-            <a:off x="8279892" y="4728362"/>
-            <a:ext cx="211226" cy="70409"/>
-          </a:xfrm>
-          <a:prstGeom prst="roundRect">
-            <a:avLst>
-              <a:gd name="adj" fmla="val 42857"/>
-            </a:avLst>
-          </a:prstGeom>
-          <a:solidFill>
-            <a:srgbClr val="3B1F5E"/>
-          </a:solidFill>
-          <a:ln w="12700">
-            <a:solidFill>
-              <a:srgbClr val="3B1F5E"/>
-            </a:solidFill>
-            <a:prstDash val="solid"/>
-          </a:ln>
-        </p:spPr>
-      </p:sp>
-      <p:sp>
-        <p:nvSpPr>
-          <p:cNvPr id="31" name="Shape 29"/>
-          <p:cNvSpPr/>
-          <p:nvPr/>
-        </p:nvSpPr>
-        <p:spPr>
-          <a:xfrm>
-            <a:off x="8330184" y="4637837"/>
-            <a:ext cx="211226" cy="70409"/>
-          </a:xfrm>
-          <a:prstGeom prst="roundRect">
-            <a:avLst>
-              <a:gd name="adj" fmla="val 42857"/>
-            </a:avLst>
-          </a:prstGeom>
-          <a:solidFill>
-            <a:srgbClr val="3B1F5E"/>
-          </a:solidFill>
-          <a:ln w="12700">
-            <a:solidFill>
-              <a:srgbClr val="3B1F5E"/>
-            </a:solidFill>
-            <a:prstDash val="solid"/>
-          </a:ln>
-        </p:spPr>
-      </p:sp>
-      <p:sp>
-        <p:nvSpPr>
-          <p:cNvPr id="32" name="Shape 30"/>
-          <p:cNvSpPr/>
-          <p:nvPr/>
-        </p:nvSpPr>
-        <p:spPr>
-          <a:xfrm>
-            <a:off x="8541410" y="4839005"/>
-            <a:ext cx="65380" cy="65380"/>
-          </a:xfrm>
-          <a:prstGeom prst="ellipse">
-            <a:avLst/>
-          </a:prstGeom>
-          <a:solidFill>
-            <a:srgbClr val="FFC83D"/>
-          </a:solidFill>
-          <a:ln w="12700">
-            <a:solidFill>
-              <a:srgbClr val="FFC83D"/>
-            </a:solidFill>
-            <a:prstDash val="solid"/>
-          </a:ln>
-        </p:spPr>
       </p:sp>
     </p:spTree>
   </p:cSld>
